--- a/Presentation.pptx
+++ b/Presentation.pptx
@@ -4,6 +4,9 @@
   <p:sldMasterIdLst>
     <p:sldMasterId id="2147483648" r:id="rId1"/>
   </p:sldMasterIdLst>
+  <p:notesMasterIdLst>
+    <p:notesMasterId r:id="rId11"/>
+  </p:notesMasterIdLst>
   <p:sldIdLst>
     <p:sldId id="256" r:id="rId2"/>
     <p:sldId id="257" r:id="rId3"/>
@@ -123,9 +126,451 @@
 <file path=ppt/revisionInfo.xml><?xml version="1.0" encoding="utf-8"?>
 <p1510:revInfo xmlns:a="http://schemas.openxmlformats.org/drawingml/2006/main" xmlns:r="http://schemas.openxmlformats.org/officeDocument/2006/relationships" xmlns:p1510="http://schemas.microsoft.com/office/powerpoint/2015/10/main">
   <p1510:revLst>
-    <p1510:client id="{6654F662-C7B5-D62C-63C1-AB90E9634709}" v="764" dt="2026-09-04T05:17:14.731"/>
+    <p1510:client id="{6654F662-C7B5-D62C-63C1-AB90E9634709}" v="854" dt="2026-09-04T07:52:02.867"/>
   </p1510:revLst>
 </p1510:revInfo>
+</file>
+
+<file path=ppt/notesMasters/notesMaster1.xml><?xml version="1.0" encoding="utf-8"?>
+<p:notesMaster xmlns:a="http://schemas.openxmlformats.org/drawingml/2006/main" xmlns:r="http://schemas.openxmlformats.org/officeDocument/2006/relationships" xmlns:p="http://schemas.openxmlformats.org/presentationml/2006/main">
+  <p:cSld>
+    <p:bg>
+      <p:bgRef idx="1001">
+        <a:schemeClr val="bg1"/>
+      </p:bgRef>
+    </p:bg>
+    <p:spTree>
+      <p:nvGrpSpPr>
+        <p:cNvPr id="1" name=""/>
+        <p:cNvGrpSpPr/>
+        <p:nvPr/>
+      </p:nvGrpSpPr>
+      <p:grpSpPr>
+        <a:xfrm>
+          <a:off x="0" y="0"/>
+          <a:ext cx="0" cy="0"/>
+          <a:chOff x="0" y="0"/>
+          <a:chExt cx="0" cy="0"/>
+        </a:xfrm>
+      </p:grpSpPr>
+      <p:sp>
+        <p:nvSpPr>
+          <p:cNvPr id="2" name="页眉占位符 1"/>
+          <p:cNvSpPr>
+            <a:spLocks noGrp="1"/>
+          </p:cNvSpPr>
+          <p:nvPr>
+            <p:ph type="hdr" sz="quarter"/>
+          </p:nvPr>
+        </p:nvSpPr>
+        <p:spPr>
+          <a:xfrm>
+            <a:off x="0" y="0"/>
+            <a:ext cx="2971800" cy="458788"/>
+          </a:xfrm>
+          <a:prstGeom prst="rect">
+            <a:avLst/>
+          </a:prstGeom>
+        </p:spPr>
+        <p:txBody>
+          <a:bodyPr vert="horz" lIns="91440" tIns="45720" rIns="91440" bIns="45720" rtlCol="0"/>
+          <a:lstStyle>
+            <a:lvl1pPr algn="l">
+              <a:defRPr sz="1200"/>
+            </a:lvl1pPr>
+          </a:lstStyle>
+          <a:p>
+            <a:endParaRPr lang="zh-CN" altLang="en-US"/>
+          </a:p>
+        </p:txBody>
+      </p:sp>
+      <p:sp>
+        <p:nvSpPr>
+          <p:cNvPr id="3" name="日期占位符 2"/>
+          <p:cNvSpPr>
+            <a:spLocks noGrp="1"/>
+          </p:cNvSpPr>
+          <p:nvPr>
+            <p:ph type="dt" idx="1"/>
+          </p:nvPr>
+        </p:nvSpPr>
+        <p:spPr>
+          <a:xfrm>
+            <a:off x="3884613" y="0"/>
+            <a:ext cx="2971800" cy="458788"/>
+          </a:xfrm>
+          <a:prstGeom prst="rect">
+            <a:avLst/>
+          </a:prstGeom>
+        </p:spPr>
+        <p:txBody>
+          <a:bodyPr vert="horz" lIns="91440" tIns="45720" rIns="91440" bIns="45720" rtlCol="0"/>
+          <a:lstStyle>
+            <a:lvl1pPr algn="r">
+              <a:defRPr sz="1200"/>
+            </a:lvl1pPr>
+          </a:lstStyle>
+          <a:p>
+            <a:fld id="{A18DD699-1FE9-41F1-8595-D9F463A153C0}" type="datetimeFigureOut">
+              <a:t>9/4/2026</a:t>
+            </a:fld>
+            <a:endParaRPr lang="zh-CN" altLang="en-US"/>
+          </a:p>
+        </p:txBody>
+      </p:sp>
+      <p:sp>
+        <p:nvSpPr>
+          <p:cNvPr id="4" name="幻灯片图像占位符 3"/>
+          <p:cNvSpPr>
+            <a:spLocks noGrp="1" noRot="1" noChangeAspect="1"/>
+          </p:cNvSpPr>
+          <p:nvPr>
+            <p:ph type="sldImg" idx="2"/>
+          </p:nvPr>
+        </p:nvSpPr>
+        <p:spPr>
+          <a:xfrm>
+            <a:off x="685800" y="1143000"/>
+            <a:ext cx="5486400" cy="3086100"/>
+          </a:xfrm>
+          <a:prstGeom prst="rect">
+            <a:avLst/>
+          </a:prstGeom>
+          <a:noFill/>
+          <a:ln w="12700">
+            <a:solidFill>
+              <a:prstClr val="black"/>
+            </a:solidFill>
+          </a:ln>
+        </p:spPr>
+        <p:txBody>
+          <a:bodyPr vert="horz" lIns="91440" tIns="45720" rIns="91440" bIns="45720" rtlCol="0" anchor="ctr"/>
+          <a:lstStyle/>
+          <a:p>
+            <a:endParaRPr lang="zh-CN" altLang="en-US"/>
+          </a:p>
+        </p:txBody>
+      </p:sp>
+      <p:sp>
+        <p:nvSpPr>
+          <p:cNvPr id="5" name="备注占位符 4"/>
+          <p:cNvSpPr>
+            <a:spLocks noGrp="1"/>
+          </p:cNvSpPr>
+          <p:nvPr>
+            <p:ph type="body" sz="quarter" idx="3"/>
+          </p:nvPr>
+        </p:nvSpPr>
+        <p:spPr>
+          <a:xfrm>
+            <a:off x="685800" y="4400550"/>
+            <a:ext cx="5486400" cy="3600450"/>
+          </a:xfrm>
+          <a:prstGeom prst="rect">
+            <a:avLst/>
+          </a:prstGeom>
+        </p:spPr>
+        <p:txBody>
+          <a:bodyPr vert="horz" lIns="91440" tIns="45720" rIns="91440" bIns="45720" rtlCol="0"/>
+          <a:lstStyle/>
+          <a:p>
+            <a:pPr lvl="0"/>
+            <a:r>
+              <a:rPr lang="zh-CN" altLang="en-US"/>
+              <a:t>单击此处编辑母版文本样式</a:t>
+            </a:r>
+          </a:p>
+          <a:p>
+            <a:pPr lvl="1"/>
+            <a:r>
+              <a:rPr lang="zh-CN" altLang="en-US"/>
+              <a:t>二级</a:t>
+            </a:r>
+          </a:p>
+          <a:p>
+            <a:pPr lvl="2"/>
+            <a:r>
+              <a:rPr lang="zh-CN" altLang="en-US"/>
+              <a:t>三级</a:t>
+            </a:r>
+          </a:p>
+          <a:p>
+            <a:pPr lvl="3"/>
+            <a:r>
+              <a:rPr lang="zh-CN" altLang="en-US"/>
+              <a:t>四级</a:t>
+            </a:r>
+          </a:p>
+          <a:p>
+            <a:pPr lvl="4"/>
+            <a:r>
+              <a:rPr lang="zh-CN" altLang="en-US"/>
+              <a:t>五级</a:t>
+            </a:r>
+          </a:p>
+        </p:txBody>
+      </p:sp>
+      <p:sp>
+        <p:nvSpPr>
+          <p:cNvPr id="6" name="页脚占位符 5"/>
+          <p:cNvSpPr>
+            <a:spLocks noGrp="1"/>
+          </p:cNvSpPr>
+          <p:nvPr>
+            <p:ph type="ftr" sz="quarter" idx="4"/>
+          </p:nvPr>
+        </p:nvSpPr>
+        <p:spPr>
+          <a:xfrm>
+            <a:off x="0" y="8685213"/>
+            <a:ext cx="2971800" cy="458787"/>
+          </a:xfrm>
+          <a:prstGeom prst="rect">
+            <a:avLst/>
+          </a:prstGeom>
+        </p:spPr>
+        <p:txBody>
+          <a:bodyPr vert="horz" lIns="91440" tIns="45720" rIns="91440" bIns="45720" rtlCol="0" anchor="b"/>
+          <a:lstStyle>
+            <a:lvl1pPr algn="l">
+              <a:defRPr sz="1200"/>
+            </a:lvl1pPr>
+          </a:lstStyle>
+          <a:p>
+            <a:endParaRPr lang="zh-CN" altLang="en-US"/>
+          </a:p>
+        </p:txBody>
+      </p:sp>
+      <p:sp>
+        <p:nvSpPr>
+          <p:cNvPr id="7" name="灯片编号占位符 6"/>
+          <p:cNvSpPr>
+            <a:spLocks noGrp="1"/>
+          </p:cNvSpPr>
+          <p:nvPr>
+            <p:ph type="sldNum" sz="quarter" idx="5"/>
+          </p:nvPr>
+        </p:nvSpPr>
+        <p:spPr>
+          <a:xfrm>
+            <a:off x="3884613" y="8685213"/>
+            <a:ext cx="2971800" cy="458787"/>
+          </a:xfrm>
+          <a:prstGeom prst="rect">
+            <a:avLst/>
+          </a:prstGeom>
+        </p:spPr>
+        <p:txBody>
+          <a:bodyPr vert="horz" lIns="91440" tIns="45720" rIns="91440" bIns="45720" rtlCol="0" anchor="b"/>
+          <a:lstStyle>
+            <a:lvl1pPr algn="r">
+              <a:defRPr sz="1200"/>
+            </a:lvl1pPr>
+          </a:lstStyle>
+          <a:p>
+            <a:fld id="{8E429F75-5D15-4237-9B90-58D45167556A}" type="slidenum">
+              <a:t>‹#›</a:t>
+            </a:fld>
+            <a:endParaRPr lang="zh-CN" altLang="en-US"/>
+          </a:p>
+        </p:txBody>
+      </p:sp>
+    </p:spTree>
+    <p:extLst>
+      <p:ext uri="{BB962C8B-B14F-4D97-AF65-F5344CB8AC3E}">
+        <p14:creationId xmlns:p14="http://schemas.microsoft.com/office/powerpoint/2010/main" val="3824457089"/>
+      </p:ext>
+    </p:extLst>
+  </p:cSld>
+  <p:clrMap bg1="lt1" tx1="dk1" bg2="lt2" tx2="dk2" accent1="accent1" accent2="accent2" accent3="accent3" accent4="accent4" accent5="accent5" accent6="accent6" hlink="hlink" folHlink="folHlink"/>
+  <p:notesStyle>
+    <a:lvl1pPr marL="0" algn="l" defTabSz="914400" rtl="0" eaLnBrk="1" latinLnBrk="0" hangingPunct="1">
+      <a:defRPr sz="1200" kern="1200">
+        <a:solidFill>
+          <a:schemeClr val="tx1"/>
+        </a:solidFill>
+        <a:latin typeface="+mn-lt"/>
+        <a:ea typeface="+mn-ea"/>
+        <a:cs typeface="+mn-cs"/>
+      </a:defRPr>
+    </a:lvl1pPr>
+    <a:lvl2pPr marL="457200" algn="l" defTabSz="914400" rtl="0" eaLnBrk="1" latinLnBrk="0" hangingPunct="1">
+      <a:defRPr sz="1200" kern="1200">
+        <a:solidFill>
+          <a:schemeClr val="tx1"/>
+        </a:solidFill>
+        <a:latin typeface="+mn-lt"/>
+        <a:ea typeface="+mn-ea"/>
+        <a:cs typeface="+mn-cs"/>
+      </a:defRPr>
+    </a:lvl2pPr>
+    <a:lvl3pPr marL="914400" algn="l" defTabSz="914400" rtl="0" eaLnBrk="1" latinLnBrk="0" hangingPunct="1">
+      <a:defRPr sz="1200" kern="1200">
+        <a:solidFill>
+          <a:schemeClr val="tx1"/>
+        </a:solidFill>
+        <a:latin typeface="+mn-lt"/>
+        <a:ea typeface="+mn-ea"/>
+        <a:cs typeface="+mn-cs"/>
+      </a:defRPr>
+    </a:lvl3pPr>
+    <a:lvl4pPr marL="1371600" algn="l" defTabSz="914400" rtl="0" eaLnBrk="1" latinLnBrk="0" hangingPunct="1">
+      <a:defRPr sz="1200" kern="1200">
+        <a:solidFill>
+          <a:schemeClr val="tx1"/>
+        </a:solidFill>
+        <a:latin typeface="+mn-lt"/>
+        <a:ea typeface="+mn-ea"/>
+        <a:cs typeface="+mn-cs"/>
+      </a:defRPr>
+    </a:lvl4pPr>
+    <a:lvl5pPr marL="1828800" algn="l" defTabSz="914400" rtl="0" eaLnBrk="1" latinLnBrk="0" hangingPunct="1">
+      <a:defRPr sz="1200" kern="1200">
+        <a:solidFill>
+          <a:schemeClr val="tx1"/>
+        </a:solidFill>
+        <a:latin typeface="+mn-lt"/>
+        <a:ea typeface="+mn-ea"/>
+        <a:cs typeface="+mn-cs"/>
+      </a:defRPr>
+    </a:lvl5pPr>
+    <a:lvl6pPr marL="2286000" algn="l" defTabSz="914400" rtl="0" eaLnBrk="1" latinLnBrk="0" hangingPunct="1">
+      <a:defRPr sz="1200" kern="1200">
+        <a:solidFill>
+          <a:schemeClr val="tx1"/>
+        </a:solidFill>
+        <a:latin typeface="+mn-lt"/>
+        <a:ea typeface="+mn-ea"/>
+        <a:cs typeface="+mn-cs"/>
+      </a:defRPr>
+    </a:lvl6pPr>
+    <a:lvl7pPr marL="2743200" algn="l" defTabSz="914400" rtl="0" eaLnBrk="1" latinLnBrk="0" hangingPunct="1">
+      <a:defRPr sz="1200" kern="1200">
+        <a:solidFill>
+          <a:schemeClr val="tx1"/>
+        </a:solidFill>
+        <a:latin typeface="+mn-lt"/>
+        <a:ea typeface="+mn-ea"/>
+        <a:cs typeface="+mn-cs"/>
+      </a:defRPr>
+    </a:lvl7pPr>
+    <a:lvl8pPr marL="3200400" algn="l" defTabSz="914400" rtl="0" eaLnBrk="1" latinLnBrk="0" hangingPunct="1">
+      <a:defRPr sz="1200" kern="1200">
+        <a:solidFill>
+          <a:schemeClr val="tx1"/>
+        </a:solidFill>
+        <a:latin typeface="+mn-lt"/>
+        <a:ea typeface="+mn-ea"/>
+        <a:cs typeface="+mn-cs"/>
+      </a:defRPr>
+    </a:lvl8pPr>
+    <a:lvl9pPr marL="3657600" algn="l" defTabSz="914400" rtl="0" eaLnBrk="1" latinLnBrk="0" hangingPunct="1">
+      <a:defRPr sz="1200" kern="1200">
+        <a:solidFill>
+          <a:schemeClr val="tx1"/>
+        </a:solidFill>
+        <a:latin typeface="+mn-lt"/>
+        <a:ea typeface="+mn-ea"/>
+        <a:cs typeface="+mn-cs"/>
+      </a:defRPr>
+    </a:lvl9pPr>
+  </p:notesStyle>
+</p:notesMaster>
+</file>
+
+<file path=ppt/notesSlides/notesSlide1.xml><?xml version="1.0" encoding="utf-8"?>
+<p:notes xmlns:a="http://schemas.openxmlformats.org/drawingml/2006/main" xmlns:r="http://schemas.openxmlformats.org/officeDocument/2006/relationships" xmlns:p="http://schemas.openxmlformats.org/presentationml/2006/main">
+  <p:cSld>
+    <p:spTree>
+      <p:nvGrpSpPr>
+        <p:cNvPr id="1" name=""/>
+        <p:cNvGrpSpPr/>
+        <p:nvPr/>
+      </p:nvGrpSpPr>
+      <p:grpSpPr>
+        <a:xfrm>
+          <a:off x="0" y="0"/>
+          <a:ext cx="0" cy="0"/>
+          <a:chOff x="0" y="0"/>
+          <a:chExt cx="0" cy="0"/>
+        </a:xfrm>
+      </p:grpSpPr>
+      <p:sp>
+        <p:nvSpPr>
+          <p:cNvPr id="2" name="幻灯片图像占位符 1"/>
+          <p:cNvSpPr>
+            <a:spLocks noGrp="1" noRot="1" noChangeAspect="1"/>
+          </p:cNvSpPr>
+          <p:nvPr>
+            <p:ph type="sldImg"/>
+          </p:nvPr>
+        </p:nvSpPr>
+        <p:spPr/>
+      </p:sp>
+      <p:sp>
+        <p:nvSpPr>
+          <p:cNvPr id="3" name="备注占位符 2"/>
+          <p:cNvSpPr>
+            <a:spLocks noGrp="1"/>
+          </p:cNvSpPr>
+          <p:nvPr>
+            <p:ph type="body" idx="1"/>
+          </p:nvPr>
+        </p:nvSpPr>
+        <p:spPr/>
+        <p:txBody>
+          <a:bodyPr/>
+          <a:lstStyle/>
+          <a:p>
+            <a:r>
+              <a:rPr lang="en-US" dirty="0">
+                <a:latin typeface="Calibri"/>
+                <a:ea typeface="Calibri"/>
+                <a:cs typeface="Calibri"/>
+              </a:rPr>
+              <a:t>11111</a:t>
+            </a:r>
+            <a:endParaRPr lang="en-US" altLang="zh-CN" dirty="0">
+              <a:latin typeface="Calibri"/>
+              <a:ea typeface="Calibri"/>
+              <a:cs typeface="Calibri"/>
+            </a:endParaRPr>
+          </a:p>
+        </p:txBody>
+      </p:sp>
+      <p:sp>
+        <p:nvSpPr>
+          <p:cNvPr id="4" name="灯片编号占位符 3"/>
+          <p:cNvSpPr>
+            <a:spLocks noGrp="1"/>
+          </p:cNvSpPr>
+          <p:nvPr>
+            <p:ph type="sldNum" sz="quarter" idx="5"/>
+          </p:nvPr>
+        </p:nvSpPr>
+        <p:spPr/>
+        <p:txBody>
+          <a:bodyPr/>
+          <a:lstStyle/>
+          <a:p>
+            <a:fld id="{8E429F75-5D15-4237-9B90-58D45167556A}" type="slidenum">
+              <a:t>7</a:t>
+            </a:fld>
+            <a:endParaRPr lang="zh-CN" altLang="en-US"/>
+          </a:p>
+        </p:txBody>
+      </p:sp>
+    </p:spTree>
+    <p:extLst>
+      <p:ext uri="{BB962C8B-B14F-4D97-AF65-F5344CB8AC3E}">
+        <p14:creationId xmlns:p14="http://schemas.microsoft.com/office/powerpoint/2010/main" val="1443845074"/>
+      </p:ext>
+    </p:extLst>
+  </p:cSld>
+  <p:clrMapOvr>
+    <a:masterClrMapping/>
+  </p:clrMapOvr>
+</p:notes>
 </file>
 
 <file path=ppt/slideLayouts/slideLayout1.xml><?xml version="1.0" encoding="utf-8"?>
@@ -257,7 +702,7 @@
           <a:p>
             <a:fld id="{E3D17B11-CCD8-4EEC-AD7E-F410C1454966}" type="datetimeFigureOut">
               <a:rPr lang="zh-CN" altLang="en-US" smtClean="0"/>
-              <a:t>2026/9/3</a:t>
+              <a:t>2026/9/4</a:t>
             </a:fld>
             <a:endParaRPr lang="zh-CN" altLang="en-US"/>
           </a:p>
@@ -425,7 +870,7 @@
           <a:p>
             <a:fld id="{E3D17B11-CCD8-4EEC-AD7E-F410C1454966}" type="datetimeFigureOut">
               <a:rPr lang="zh-CN" altLang="en-US" smtClean="0"/>
-              <a:t>2026/9/3</a:t>
+              <a:t>2026/9/4</a:t>
             </a:fld>
             <a:endParaRPr lang="zh-CN" altLang="en-US"/>
           </a:p>
@@ -603,7 +1048,7 @@
           <a:p>
             <a:fld id="{E3D17B11-CCD8-4EEC-AD7E-F410C1454966}" type="datetimeFigureOut">
               <a:rPr lang="zh-CN" altLang="en-US" smtClean="0"/>
-              <a:t>2026/9/3</a:t>
+              <a:t>2026/9/4</a:t>
             </a:fld>
             <a:endParaRPr lang="zh-CN" altLang="en-US"/>
           </a:p>
@@ -771,7 +1216,7 @@
           <a:p>
             <a:fld id="{E3D17B11-CCD8-4EEC-AD7E-F410C1454966}" type="datetimeFigureOut">
               <a:rPr lang="zh-CN" altLang="en-US" smtClean="0"/>
-              <a:t>2026/9/3</a:t>
+              <a:t>2026/9/4</a:t>
             </a:fld>
             <a:endParaRPr lang="zh-CN" altLang="en-US"/>
           </a:p>
@@ -1016,7 +1461,7 @@
           <a:p>
             <a:fld id="{E3D17B11-CCD8-4EEC-AD7E-F410C1454966}" type="datetimeFigureOut">
               <a:rPr lang="zh-CN" altLang="en-US" smtClean="0"/>
-              <a:t>2026/9/3</a:t>
+              <a:t>2026/9/4</a:t>
             </a:fld>
             <a:endParaRPr lang="zh-CN" altLang="en-US"/>
           </a:p>
@@ -1245,7 +1690,7 @@
           <a:p>
             <a:fld id="{E3D17B11-CCD8-4EEC-AD7E-F410C1454966}" type="datetimeFigureOut">
               <a:rPr lang="zh-CN" altLang="en-US" smtClean="0"/>
-              <a:t>2026/9/3</a:t>
+              <a:t>2026/9/4</a:t>
             </a:fld>
             <a:endParaRPr lang="zh-CN" altLang="en-US"/>
           </a:p>
@@ -1609,7 +2054,7 @@
           <a:p>
             <a:fld id="{E3D17B11-CCD8-4EEC-AD7E-F410C1454966}" type="datetimeFigureOut">
               <a:rPr lang="zh-CN" altLang="en-US" smtClean="0"/>
-              <a:t>2026/9/3</a:t>
+              <a:t>2026/9/4</a:t>
             </a:fld>
             <a:endParaRPr lang="zh-CN" altLang="en-US"/>
           </a:p>
@@ -1726,7 +2171,7 @@
           <a:p>
             <a:fld id="{E3D17B11-CCD8-4EEC-AD7E-F410C1454966}" type="datetimeFigureOut">
               <a:rPr lang="zh-CN" altLang="en-US" smtClean="0"/>
-              <a:t>2026/9/3</a:t>
+              <a:t>2026/9/4</a:t>
             </a:fld>
             <a:endParaRPr lang="zh-CN" altLang="en-US"/>
           </a:p>
@@ -1821,7 +2266,7 @@
           <a:p>
             <a:fld id="{E3D17B11-CCD8-4EEC-AD7E-F410C1454966}" type="datetimeFigureOut">
               <a:rPr lang="zh-CN" altLang="en-US" smtClean="0"/>
-              <a:t>2026/9/3</a:t>
+              <a:t>2026/9/4</a:t>
             </a:fld>
             <a:endParaRPr lang="zh-CN" altLang="en-US"/>
           </a:p>
@@ -2096,7 +2541,7 @@
           <a:p>
             <a:fld id="{E3D17B11-CCD8-4EEC-AD7E-F410C1454966}" type="datetimeFigureOut">
               <a:rPr lang="zh-CN" altLang="en-US" smtClean="0"/>
-              <a:t>2026/9/3</a:t>
+              <a:t>2026/9/4</a:t>
             </a:fld>
             <a:endParaRPr lang="zh-CN" altLang="en-US"/>
           </a:p>
@@ -2348,7 +2793,7 @@
           <a:p>
             <a:fld id="{E3D17B11-CCD8-4EEC-AD7E-F410C1454966}" type="datetimeFigureOut">
               <a:rPr lang="zh-CN" altLang="en-US" smtClean="0"/>
-              <a:t>2026/9/3</a:t>
+              <a:t>2026/9/4</a:t>
             </a:fld>
             <a:endParaRPr lang="zh-CN" altLang="en-US"/>
           </a:p>
@@ -2559,7 +3004,7 @@
           <a:p>
             <a:fld id="{E3D17B11-CCD8-4EEC-AD7E-F410C1454966}" type="datetimeFigureOut">
               <a:rPr lang="zh-CN" altLang="en-US" smtClean="0"/>
-              <a:t>2026/9/3</a:t>
+              <a:t>2026/9/4</a:t>
             </a:fld>
             <a:endParaRPr lang="zh-CN" altLang="en-US"/>
           </a:p>
@@ -2988,12 +3433,44 @@
           <a:p>
             <a:pPr algn="l"/>
             <a:r>
+              <a:rPr lang="en-US" altLang="zh-CN" sz="4800" dirty="0" err="1">
+                <a:latin typeface="Times New Roman"/>
+                <a:ea typeface="+mj-lt"/>
+                <a:cs typeface="Times New Roman"/>
+              </a:rPr>
+              <a:t>Wh</a:t>
+            </a:r>
+            <a:r>
+              <a:rPr lang="zh-CN" sz="4800">
+                <a:latin typeface="Times New Roman"/>
+                <a:ea typeface="+mj-lt"/>
+                <a:cs typeface="Times New Roman"/>
+              </a:rPr>
+              <a:t>y </a:t>
+            </a:r>
+            <a:r>
               <a:rPr lang="en-US" altLang="zh-CN" sz="4800" dirty="0">
                 <a:latin typeface="Times New Roman"/>
                 <a:ea typeface="+mj-lt"/>
                 <a:cs typeface="Times New Roman"/>
               </a:rPr>
-              <a:t>Inv</a:t>
+              <a:t>Do</a:t>
+            </a:r>
+            <a:r>
+              <a:rPr lang="zh-CN" sz="4800" dirty="0">
+                <a:latin typeface="Times New Roman"/>
+                <a:ea typeface="+mj-lt"/>
+                <a:cs typeface="Times New Roman"/>
+              </a:rPr>
+              <a:t> </a:t>
+            </a:r>
+            <a:r>
+              <a:rPr lang="en-US" altLang="zh-CN" sz="4800" dirty="0">
+                <a:latin typeface="Times New Roman"/>
+                <a:ea typeface="+mj-lt"/>
+                <a:cs typeface="Times New Roman"/>
+              </a:rPr>
+              <a:t>Some</a:t>
             </a:r>
             <a:r>
               <a:rPr lang="zh-CN" sz="4800">
@@ -3001,7 +3478,7 @@
                 <a:ea typeface="+mj-lt"/>
                 <a:cs typeface="Times New Roman"/>
               </a:rPr>
-              <a:t>estigatin</a:t>
+              <a:t> Xiaohongshu Recommendation </a:t>
             </a:r>
             <a:r>
               <a:rPr lang="en-US" altLang="zh-CN" sz="4800" dirty="0">
@@ -3009,10 +3486,10 @@
                 <a:ea typeface="+mj-lt"/>
                 <a:cs typeface="Times New Roman"/>
               </a:rPr>
-              <a:t>g</a:t>
-            </a:r>
-            <a:r>
-              <a:rPr lang="zh-CN" altLang="en-US" sz="4800">
+              <a:t>Positions</a:t>
+            </a:r>
+            <a:r>
+              <a:rPr lang="zh-CN" sz="4800" dirty="0">
                 <a:latin typeface="Times New Roman"/>
                 <a:ea typeface="+mj-lt"/>
                 <a:cs typeface="Times New Roman"/>
@@ -3020,80 +3497,63 @@
               <a:t> </a:t>
             </a:r>
             <a:r>
+              <a:rPr lang="en-US" altLang="zh-CN" sz="4800" dirty="0">
+                <a:latin typeface="Times New Roman"/>
+                <a:ea typeface="+mj-lt"/>
+                <a:cs typeface="Times New Roman"/>
+              </a:rPr>
+              <a:t>Get</a:t>
+            </a:r>
+            <a:r>
+              <a:rPr lang="zh-CN" sz="4800" dirty="0">
+                <a:latin typeface="Times New Roman"/>
+                <a:ea typeface="+mj-lt"/>
+                <a:cs typeface="Times New Roman"/>
+              </a:rPr>
+              <a:t> </a:t>
+            </a:r>
+            <a:r>
+              <a:rPr lang="en-US" altLang="zh-CN" sz="4800" dirty="0">
+                <a:latin typeface="Times New Roman"/>
+                <a:ea typeface="+mj-lt"/>
+                <a:cs typeface="Times New Roman"/>
+              </a:rPr>
+              <a:t>Fewer</a:t>
+            </a:r>
+            <a:r>
+              <a:rPr lang="zh-CN" sz="4800" dirty="0">
+                <a:latin typeface="Times New Roman"/>
+                <a:ea typeface="+mj-lt"/>
+                <a:cs typeface="Times New Roman"/>
+              </a:rPr>
+              <a:t> </a:t>
+            </a:r>
+            <a:r>
+              <a:rPr lang="en-US" altLang="zh-CN" sz="4800" dirty="0">
+                <a:latin typeface="Times New Roman"/>
+                <a:ea typeface="+mj-lt"/>
+                <a:cs typeface="Times New Roman"/>
+              </a:rPr>
+              <a:t>Click</a:t>
+            </a:r>
+            <a:r>
               <a:rPr lang="zh-CN" sz="4800">
                 <a:latin typeface="Times New Roman"/>
                 <a:ea typeface="+mj-lt"/>
                 <a:cs typeface="Times New Roman"/>
               </a:rPr>
-              <a:t>a</a:t>
-            </a:r>
-            <a:r>
-              <a:rPr lang="zh-CN" altLang="en-US" sz="4800">
+              <a:t>s</a:t>
+            </a:r>
+            <a:r>
+              <a:rPr lang="en-US" altLang="zh-CN" sz="4800" dirty="0">
                 <a:latin typeface="Times New Roman"/>
                 <a:ea typeface="+mj-lt"/>
                 <a:cs typeface="Times New Roman"/>
               </a:rPr>
-              <a:t> </a:t>
-            </a:r>
-            <a:r>
-              <a:rPr lang="en-US" altLang="zh-CN" sz="4800" dirty="0">
-                <a:latin typeface="Times New Roman"/>
-                <a:ea typeface="+mj-lt"/>
-                <a:cs typeface="Times New Roman"/>
-              </a:rPr>
-              <a:t>R</a:t>
-            </a:r>
-            <a:r>
-              <a:rPr lang="zh-CN" sz="4800">
-                <a:latin typeface="Times New Roman"/>
-                <a:ea typeface="+mj-lt"/>
-                <a:cs typeface="Times New Roman"/>
-              </a:rPr>
-              <a:t>ecurring</a:t>
-            </a:r>
-            <a:r>
-              <a:rPr lang="zh-CN" altLang="en-US" sz="4800">
-                <a:latin typeface="Times New Roman"/>
-                <a:ea typeface="+mj-lt"/>
-                <a:cs typeface="Times New Roman"/>
-              </a:rPr>
-              <a:t> </a:t>
-            </a:r>
-            <a:r>
-              <a:rPr lang="en-US" altLang="zh-CN" sz="4800" dirty="0">
-                <a:latin typeface="Times New Roman"/>
-                <a:ea typeface="+mj-lt"/>
-                <a:cs typeface="Times New Roman"/>
-              </a:rPr>
-              <a:t>Click-Through Rate</a:t>
-            </a:r>
-            <a:r>
-              <a:rPr lang="zh-CN" altLang="en-US" sz="4800" dirty="0">
-                <a:latin typeface="Times New Roman"/>
-                <a:ea typeface="+mj-lt"/>
-                <a:cs typeface="Times New Roman"/>
-              </a:rPr>
-              <a:t> </a:t>
-            </a:r>
-            <a:r>
-              <a:rPr lang="en-US" altLang="zh-CN" sz="4800" dirty="0">
-                <a:latin typeface="Times New Roman"/>
-                <a:ea typeface="+mj-lt"/>
-                <a:cs typeface="Times New Roman"/>
-              </a:rPr>
-              <a:t>Ano</a:t>
-            </a:r>
-            <a:r>
-              <a:rPr lang="zh-CN" sz="4800">
-                <a:latin typeface="Times New Roman"/>
-                <a:ea typeface="+mj-lt"/>
-                <a:cs typeface="Times New Roman"/>
-              </a:rPr>
-              <a:t>maly in Xiaohongshu Recommendations</a:t>
-            </a:r>
-            <a:endParaRPr lang="zh-CN" altLang="en-US" sz="4800" dirty="0">
+              <a:t>?</a:t>
+            </a:r>
+            <a:endParaRPr lang="zh-CN" altLang="en-US" dirty="0">
               <a:latin typeface="Times New Roman"/>
-              <a:ea typeface="+mj-lt"/>
               <a:cs typeface="Times New Roman"/>
             </a:endParaRPr>
           </a:p>
@@ -3197,6 +3657,37 @@
           </a:p>
         </p:txBody>
       </p:sp>
+      <p:pic>
+        <p:nvPicPr>
+          <p:cNvPr id="5" name="图片 4">
+            <a:extLst>
+              <a:ext uri="{FF2B5EF4-FFF2-40B4-BE49-F238E27FC236}">
+                <a16:creationId xmlns:a16="http://schemas.microsoft.com/office/drawing/2014/main" id="{866B56BD-527C-1E25-8E0C-7E21F3392DEC}"/>
+              </a:ext>
+            </a:extLst>
+          </p:cNvPr>
+          <p:cNvPicPr>
+            <a:picLocks noChangeAspect="1"/>
+          </p:cNvPicPr>
+          <p:nvPr/>
+        </p:nvPicPr>
+        <p:blipFill>
+          <a:blip r:embed="rId2"/>
+          <a:srcRect t="5897" r="182" b="-84"/>
+          <a:stretch>
+            <a:fillRect/>
+          </a:stretch>
+        </p:blipFill>
+        <p:spPr>
+          <a:xfrm>
+            <a:off x="9614600" y="1270000"/>
+            <a:ext cx="2112575" cy="4311898"/>
+          </a:xfrm>
+          <a:prstGeom prst="rect">
+            <a:avLst/>
+          </a:prstGeom>
+        </p:spPr>
+      </p:pic>
     </p:spTree>
     <p:extLst>
       <p:ext uri="{BB962C8B-B14F-4D97-AF65-F5344CB8AC3E}">
@@ -4778,14 +5269,14 @@
           <a:lstStyle/>
           <a:p>
             <a:r>
-              <a:rPr lang="en-US" sz="2000" dirty="0">
+              <a:rPr lang="en-US" sz="2000">
                 <a:latin typeface="Times New Roman"/>
                 <a:ea typeface="+mn-lt"/>
                 <a:cs typeface="Times New Roman"/>
               </a:rPr>
               <a:t>CTR generally declines with rank, but position 6 shows an unusually sharp dip. </a:t>
             </a:r>
-            <a:endParaRPr lang="zh-CN" sz="2000" dirty="0">
+            <a:endParaRPr lang="zh-CN" sz="2000">
               <a:latin typeface="Aptos"/>
               <a:ea typeface="等线"/>
               <a:cs typeface="Times New Roman"/>
@@ -4799,13 +5290,13 @@
           </a:p>
           <a:p>
             <a:r>
-              <a:rPr lang="en-US" sz="2000" b="1" dirty="0">
+              <a:rPr lang="en-US" sz="2000" b="1">
                 <a:ea typeface="+mn-lt"/>
                 <a:cs typeface="+mn-lt"/>
               </a:rPr>
               <a:t>"We guess these positions have higher probabilities of exposing commercial notes." (Chen et al., 2025, p. 3675)</a:t>
             </a:r>
-            <a:endParaRPr lang="en-US" sz="2000" b="1" dirty="0"/>
+            <a:endParaRPr lang="en-US" sz="2000" b="1"/>
           </a:p>
           <a:p>
             <a:endParaRPr lang="en-US" sz="2000">
@@ -5034,14 +5525,14 @@
           <a:lstStyle/>
           <a:p>
             <a:r>
-              <a:rPr lang="en-US" sz="3200" dirty="0">
+              <a:rPr lang="en-US" sz="3200">
                 <a:latin typeface="Times New Roman"/>
                 <a:ea typeface="+mj-lt"/>
                 <a:cs typeface="Times New Roman"/>
               </a:rPr>
               <a:t>Initial Evidence Supports the Commercial Hypothesis </a:t>
             </a:r>
-            <a:endParaRPr lang="zh-CN" sz="3200" dirty="0">
+            <a:endParaRPr lang="zh-CN" sz="3200">
               <a:latin typeface="Times New Roman"/>
               <a:ea typeface="等线 Light"/>
               <a:cs typeface="Times New Roman"/>
@@ -6115,7 +6606,7 @@
               </a:rPr>
               <a:t> , 14 </a:t>
             </a:r>
-            <a:endParaRPr lang="zh-CN" altLang="en-US" sz="2000" dirty="0">
+            <a:endParaRPr lang="zh-CN" altLang="en-US" sz="2000">
               <a:latin typeface="Times New Roman"/>
               <a:ea typeface="等线"/>
               <a:cs typeface="Times New Roman"/>
@@ -6156,7 +6647,7 @@
             </a:endParaRPr>
           </a:p>
           <a:p>
-            <a:endParaRPr lang="zh-CN" altLang="en-US" sz="2000" dirty="0">
+            <a:endParaRPr lang="zh-CN" altLang="en-US" sz="2000">
               <a:latin typeface="Times New Roman"/>
               <a:ea typeface="等线"/>
               <a:cs typeface="Times New Roman"/>
@@ -6331,7 +6822,7 @@
           </a:p>
           <a:p>
             <a:pPr algn="l"/>
-            <a:endParaRPr lang="zh-CN" altLang="en-US" sz="2000" dirty="0">
+            <a:endParaRPr lang="zh-CN" altLang="en-US" sz="2000">
               <a:latin typeface="Times New Roman"/>
               <a:ea typeface="等线"/>
               <a:cs typeface="Times New Roman"/>
@@ -6803,15 +7294,7 @@
                 <a:ea typeface="+mn-lt"/>
                 <a:cs typeface="Times New Roman"/>
               </a:rPr>
-              <a:t>Therefore, commercial exposure alone is not sufficient to explain the </a:t>
-            </a:r>
-            <a:r>
-              <a:rPr lang="zh-CN" sz="2200" dirty="0">
-                <a:latin typeface="Times New Roman"/>
-                <a:ea typeface="+mn-lt"/>
-                <a:cs typeface="Times New Roman"/>
-              </a:rPr>
-              <a:t>recurring engagement penalty.</a:t>
+              <a:t>Therefore, commercial exposure alone is not sufficient to explain the recurring engagement penalty.</a:t>
             </a:r>
             <a:endParaRPr lang="en-US" sz="2200">
               <a:latin typeface="Times New Roman"/>
@@ -6943,7 +7426,7 @@
           <a:lstStyle/>
           <a:p>
             <a:r>
-              <a:rPr lang="en-US" sz="1800" b="1" dirty="0">
+              <a:rPr lang="en-US" sz="1800" b="1">
                 <a:latin typeface="Times New Roman"/>
                 <a:ea typeface="等线"/>
                 <a:cs typeface="Times New Roman"/>
@@ -6951,7 +7434,7 @@
               <a:t>M1: </a:t>
             </a:r>
             <a:r>
-              <a:rPr lang="en-US" sz="1800" b="1" dirty="0" err="1">
+              <a:rPr lang="en-US" sz="1800" b="1" err="1">
                 <a:latin typeface="Times New Roman"/>
                 <a:ea typeface="等线"/>
                 <a:cs typeface="Times New Roman"/>
@@ -6959,7 +7442,7 @@
               <a:t>Click∼C</a:t>
             </a:r>
             <a:r>
-              <a:rPr lang="en-US" sz="1800" b="1" dirty="0">
+              <a:rPr lang="en-US" sz="1800" b="1">
                 <a:latin typeface="Times New Roman"/>
                 <a:ea typeface="等线"/>
                 <a:cs typeface="Times New Roman"/>
@@ -6967,7 +7450,7 @@
               <a:t>(Block)+C(</a:t>
             </a:r>
             <a:r>
-              <a:rPr lang="en-US" sz="1800" b="1" dirty="0" err="1">
+              <a:rPr lang="en-US" sz="1800" b="1" err="1">
                 <a:latin typeface="Times New Roman"/>
                 <a:ea typeface="等线"/>
                 <a:cs typeface="Times New Roman"/>
@@ -6975,7 +7458,7 @@
               <a:t>WithinBlockPosition</a:t>
             </a:r>
             <a:r>
-              <a:rPr lang="en-US" sz="1800" b="1" dirty="0">
+              <a:rPr lang="en-US" sz="1800" b="1">
                 <a:latin typeface="Times New Roman"/>
                 <a:ea typeface="等线"/>
                 <a:cs typeface="Times New Roman"/>
@@ -6985,14 +7468,14 @@
           </a:p>
           <a:p>
             <a:r>
-              <a:rPr lang="en-US" sz="1800" dirty="0">
+              <a:rPr lang="en-US" sz="1800">
                 <a:latin typeface="Times New Roman"/>
                 <a:ea typeface="+mn-lt"/>
                 <a:cs typeface="Times New Roman"/>
               </a:rPr>
               <a:t>Tests whether the sixth position within each seven-item block is associated with lower click probability.</a:t>
             </a:r>
-            <a:endParaRPr lang="en-US" sz="1800" b="1" dirty="0">
+            <a:endParaRPr lang="en-US" sz="1800" b="1">
               <a:latin typeface="Times New Roman"/>
               <a:ea typeface="+mn-lt"/>
               <a:cs typeface="Times New Roman"/>
@@ -7044,7 +7527,7 @@
             </a:r>
           </a:p>
           <a:p>
-            <a:endParaRPr lang="zh-CN" b="1" dirty="0">
+            <a:endParaRPr lang="zh-CN" b="1">
               <a:highlight>
                 <a:srgbClr val="FFFF00"/>
               </a:highlight>
@@ -7174,7 +7657,7 @@
           <a:lstStyle/>
           <a:p>
             <a:r>
-              <a:rPr lang="en-US" sz="3200" dirty="0">
+              <a:rPr lang="en-US" sz="3200">
                 <a:latin typeface="Times New Roman"/>
                 <a:ea typeface="+mj-lt"/>
                 <a:cs typeface="Times New Roman"/>
@@ -7218,12 +7701,12 @@
           <a:lstStyle/>
           <a:p>
             <a:r>
-              <a:rPr lang="zh-CN" altLang="en-US" sz="2000">
+              <a:rPr lang="zh-CN" sz="2000">
                 <a:latin typeface="Times New Roman"/>
                 <a:ea typeface="等线"/>
                 <a:cs typeface="Times New Roman"/>
               </a:rPr>
-              <a:t>Revised approach</a:t>
+              <a:t>1. Predict expected click probability from position and context</a:t>
             </a:r>
             <a:endParaRPr lang="zh-CN" altLang="en-US" sz="2000">
               <a:latin typeface="Times New Roman"/>
@@ -7232,17 +7715,7 @@
             </a:endParaRPr>
           </a:p>
           <a:p>
-            <a:r>
-              <a:rPr lang="zh-CN" sz="2000">
-                <a:latin typeface="Times New Roman"/>
-                <a:ea typeface="等线"/>
-                <a:cs typeface="Times New Roman"/>
-              </a:rPr>
-              <a:t>1. Predict expected click probability from position and context</a:t>
-            </a:r>
-          </a:p>
-          <a:p>
-            <a:endParaRPr lang="zh-CN" altLang="en-US" sz="2000" dirty="0">
+            <a:endParaRPr lang="zh-CN" altLang="en-US" sz="2000">
               <a:latin typeface="Times New Roman"/>
               <a:ea typeface="等线"/>
               <a:cs typeface="Times New Roman"/>
@@ -7259,7 +7732,7 @@
             </a:r>
           </a:p>
           <a:p>
-            <a:endParaRPr lang="zh-CN" altLang="en-US" sz="2000" dirty="0">
+            <a:endParaRPr lang="zh-CN" altLang="en-US" sz="2000">
               <a:latin typeface="Times New Roman"/>
               <a:ea typeface="等线"/>
               <a:cs typeface="Times New Roman"/>
@@ -7286,7 +7759,7 @@
             </a:r>
           </a:p>
           <a:p>
-            <a:endParaRPr lang="zh-CN" altLang="en-US" sz="2000" dirty="0">
+            <a:endParaRPr lang="zh-CN" altLang="en-US" sz="2000">
               <a:latin typeface="Aptos"/>
               <a:ea typeface="等线" panose="02010600030101010101" pitchFamily="2" charset="-122"/>
               <a:cs typeface="Times New Roman"/>
@@ -7309,14 +7782,14 @@
           <p:nvPr/>
         </p:nvPicPr>
         <p:blipFill>
-          <a:blip r:embed="rId2"/>
+          <a:blip r:embed="rId3"/>
           <a:stretch>
             <a:fillRect/>
           </a:stretch>
         </p:blipFill>
         <p:spPr>
           <a:xfrm>
-            <a:off x="1231900" y="2612160"/>
+            <a:off x="1231900" y="2156115"/>
             <a:ext cx="3920837" cy="444501"/>
           </a:xfrm>
           <a:prstGeom prst="rect">
@@ -7339,14 +7812,14 @@
           <p:nvPr/>
         </p:nvPicPr>
         <p:blipFill>
-          <a:blip r:embed="rId3"/>
+          <a:blip r:embed="rId4"/>
           <a:stretch>
             <a:fillRect/>
           </a:stretch>
         </p:blipFill>
         <p:spPr>
           <a:xfrm>
-            <a:off x="1233632" y="3430154"/>
+            <a:off x="1233632" y="2979881"/>
             <a:ext cx="3132282" cy="447965"/>
           </a:xfrm>
           <a:prstGeom prst="rect">
@@ -7369,14 +7842,14 @@
           <p:nvPr/>
         </p:nvPicPr>
         <p:blipFill>
-          <a:blip r:embed="rId4"/>
+          <a:blip r:embed="rId5"/>
           <a:stretch>
             <a:fillRect/>
           </a:stretch>
         </p:blipFill>
         <p:spPr>
           <a:xfrm>
-            <a:off x="1233055" y="4667972"/>
+            <a:off x="1233055" y="4344699"/>
             <a:ext cx="4010891" cy="2192194"/>
           </a:xfrm>
           <a:prstGeom prst="rect">
@@ -7398,8 +7871,8 @@
         </p:nvSpPr>
         <p:spPr>
           <a:xfrm>
-            <a:off x="2362821" y="6308701"/>
-            <a:ext cx="281384" cy="79783"/>
+            <a:off x="2374366" y="5950792"/>
+            <a:ext cx="281384" cy="131737"/>
           </a:xfrm>
           <a:prstGeom prst="rightArrow">
             <a:avLst/>
@@ -7444,8 +7917,8 @@
         </p:nvSpPr>
         <p:spPr>
           <a:xfrm>
-            <a:off x="5782940" y="5105311"/>
-            <a:ext cx="5952124" cy="923330"/>
+            <a:off x="5430804" y="4874402"/>
+            <a:ext cx="5940579" cy="646331"/>
           </a:xfrm>
           <a:prstGeom prst="rect">
             <a:avLst/>
@@ -7462,6 +7935,17 @@
           <a:lstStyle/>
           <a:p>
             <a:r>
+              <a:rPr lang="en-US" altLang="zh-CN" dirty="0">
+                <a:highlight>
+                  <a:srgbClr val="FFFF00"/>
+                </a:highlight>
+                <a:latin typeface="Times New Roman"/>
+                <a:ea typeface="+mn-lt"/>
+                <a:cs typeface="Times New Roman"/>
+              </a:rPr>
+              <a:t>C</a:t>
+            </a:r>
+            <a:r>
               <a:rPr lang="zh-CN">
                 <a:highlight>
                   <a:srgbClr val="FFFF00"/>
@@ -7470,9 +7954,231 @@
                 <a:ea typeface="+mn-lt"/>
                 <a:cs typeface="Times New Roman"/>
               </a:rPr>
-              <a:t>The sixth slot may not only suffer from a positional disadvantage; it also appears to receive candidates with weaker position-adjusted out-of-sample performance.</a:t>
-            </a:r>
-            <a:endParaRPr lang="zh-CN">
+              <a:t>an</a:t>
+            </a:r>
+            <a:r>
+              <a:rPr lang="en-US" altLang="zh-CN" dirty="0" err="1">
+                <a:highlight>
+                  <a:srgbClr val="FFFF00"/>
+                </a:highlight>
+                <a:latin typeface="Times New Roman"/>
+                <a:ea typeface="+mn-lt"/>
+                <a:cs typeface="Times New Roman"/>
+              </a:rPr>
+              <a:t>dida</a:t>
+            </a:r>
+            <a:r>
+              <a:rPr lang="zh-CN">
+                <a:highlight>
+                  <a:srgbClr val="FFFF00"/>
+                </a:highlight>
+                <a:latin typeface="Times New Roman"/>
+                <a:ea typeface="+mn-lt"/>
+                <a:cs typeface="Times New Roman"/>
+              </a:rPr>
+              <a:t>t</a:t>
+            </a:r>
+            <a:r>
+              <a:rPr lang="en-US" altLang="zh-CN" dirty="0">
+                <a:highlight>
+                  <a:srgbClr val="FFFF00"/>
+                </a:highlight>
+                <a:latin typeface="Times New Roman"/>
+                <a:ea typeface="+mn-lt"/>
+                <a:cs typeface="Times New Roman"/>
+              </a:rPr>
+              <a:t>e</a:t>
+            </a:r>
+            <a:r>
+              <a:rPr lang="zh-CN">
+                <a:highlight>
+                  <a:srgbClr val="FFFF00"/>
+                </a:highlight>
+                <a:latin typeface="Times New Roman"/>
+                <a:ea typeface="+mn-lt"/>
+                <a:cs typeface="Times New Roman"/>
+              </a:rPr>
+              <a:t> se</a:t>
+            </a:r>
+            <a:r>
+              <a:rPr lang="en-US" altLang="zh-CN" dirty="0" err="1">
+                <a:highlight>
+                  <a:srgbClr val="FFFF00"/>
+                </a:highlight>
+                <a:latin typeface="Times New Roman"/>
+                <a:ea typeface="+mn-lt"/>
+                <a:cs typeface="Times New Roman"/>
+              </a:rPr>
+              <a:t>lec</a:t>
+            </a:r>
+            <a:r>
+              <a:rPr lang="zh-CN">
+                <a:highlight>
+                  <a:srgbClr val="FFFF00"/>
+                </a:highlight>
+                <a:latin typeface="Times New Roman"/>
+                <a:ea typeface="+mn-lt"/>
+                <a:cs typeface="Times New Roman"/>
+              </a:rPr>
+              <a:t>tion </a:t>
+            </a:r>
+            <a:r>
+              <a:rPr lang="en-US" altLang="zh-CN" dirty="0">
+                <a:highlight>
+                  <a:srgbClr val="FFFF00"/>
+                </a:highlight>
+                <a:latin typeface="Times New Roman"/>
+                <a:ea typeface="+mn-lt"/>
+                <a:cs typeface="Times New Roman"/>
+              </a:rPr>
+              <a:t>m</a:t>
+            </a:r>
+            <a:r>
+              <a:rPr lang="zh-CN">
+                <a:highlight>
+                  <a:srgbClr val="FFFF00"/>
+                </a:highlight>
+                <a:latin typeface="Times New Roman"/>
+                <a:ea typeface="+mn-lt"/>
+                <a:cs typeface="Times New Roman"/>
+              </a:rPr>
+              <a:t>a</a:t>
+            </a:r>
+            <a:r>
+              <a:rPr lang="en-US" altLang="zh-CN" dirty="0">
+                <a:highlight>
+                  <a:srgbClr val="FFFF00"/>
+                </a:highlight>
+                <a:latin typeface="Times New Roman"/>
+                <a:ea typeface="+mn-lt"/>
+                <a:cs typeface="Times New Roman"/>
+              </a:rPr>
+              <a:t>y</a:t>
+            </a:r>
+            <a:r>
+              <a:rPr lang="zh-CN">
+                <a:highlight>
+                  <a:srgbClr val="FFFF00"/>
+                </a:highlight>
+                <a:latin typeface="Times New Roman"/>
+                <a:ea typeface="+mn-lt"/>
+                <a:cs typeface="Times New Roman"/>
+              </a:rPr>
+              <a:t> also c</a:t>
+            </a:r>
+            <a:r>
+              <a:rPr lang="en-US" altLang="zh-CN" dirty="0">
+                <a:highlight>
+                  <a:srgbClr val="FFFF00"/>
+                </a:highlight>
+                <a:latin typeface="Times New Roman"/>
+                <a:ea typeface="+mn-lt"/>
+                <a:cs typeface="Times New Roman"/>
+              </a:rPr>
+              <a:t>o</a:t>
+            </a:r>
+            <a:r>
+              <a:rPr lang="zh-CN">
+                <a:highlight>
+                  <a:srgbClr val="FFFF00"/>
+                </a:highlight>
+                <a:latin typeface="Times New Roman"/>
+                <a:ea typeface="+mn-lt"/>
+                <a:cs typeface="Times New Roman"/>
+              </a:rPr>
+              <a:t>ntri</a:t>
+            </a:r>
+            <a:r>
+              <a:rPr lang="en-US" altLang="zh-CN" dirty="0">
+                <a:highlight>
+                  <a:srgbClr val="FFFF00"/>
+                </a:highlight>
+                <a:latin typeface="Times New Roman"/>
+                <a:ea typeface="+mn-lt"/>
+                <a:cs typeface="Times New Roman"/>
+              </a:rPr>
+              <a:t>b</a:t>
+            </a:r>
+            <a:r>
+              <a:rPr lang="zh-CN">
+                <a:highlight>
+                  <a:srgbClr val="FFFF00"/>
+                </a:highlight>
+                <a:latin typeface="Times New Roman"/>
+                <a:ea typeface="+mn-lt"/>
+                <a:cs typeface="Times New Roman"/>
+              </a:rPr>
+              <a:t>ute to </a:t>
+            </a:r>
+            <a:r>
+              <a:rPr lang="en-US" altLang="zh-CN" dirty="0" err="1">
+                <a:highlight>
+                  <a:srgbClr val="FFFF00"/>
+                </a:highlight>
+                <a:latin typeface="Times New Roman"/>
+                <a:ea typeface="+mn-lt"/>
+                <a:cs typeface="Times New Roman"/>
+              </a:rPr>
+              <a:t>th</a:t>
+            </a:r>
+            <a:r>
+              <a:rPr lang="zh-CN">
+                <a:highlight>
+                  <a:srgbClr val="FFFF00"/>
+                </a:highlight>
+                <a:latin typeface="Times New Roman"/>
+                <a:ea typeface="+mn-lt"/>
+                <a:cs typeface="Times New Roman"/>
+              </a:rPr>
+              <a:t>e </a:t>
+            </a:r>
+            <a:r>
+              <a:rPr lang="en-US" altLang="zh-CN" dirty="0">
+                <a:highlight>
+                  <a:srgbClr val="FFFF00"/>
+                </a:highlight>
+                <a:latin typeface="Times New Roman"/>
+                <a:ea typeface="+mn-lt"/>
+                <a:cs typeface="Times New Roman"/>
+              </a:rPr>
+              <a:t>CTR</a:t>
+            </a:r>
+            <a:r>
+              <a:rPr lang="zh-CN">
+                <a:highlight>
+                  <a:srgbClr val="FFFF00"/>
+                </a:highlight>
+                <a:latin typeface="Times New Roman"/>
+                <a:ea typeface="+mn-lt"/>
+                <a:cs typeface="Times New Roman"/>
+              </a:rPr>
+              <a:t> pen</a:t>
+            </a:r>
+            <a:r>
+              <a:rPr lang="en-US" altLang="zh-CN" dirty="0" err="1">
+                <a:highlight>
+                  <a:srgbClr val="FFFF00"/>
+                </a:highlight>
+                <a:latin typeface="Times New Roman"/>
+                <a:ea typeface="+mn-lt"/>
+                <a:cs typeface="Times New Roman"/>
+              </a:rPr>
+              <a:t>alty</a:t>
+            </a:r>
+            <a:r>
+              <a:rPr lang="zh-CN" dirty="0">
+                <a:highlight>
+                  <a:srgbClr val="FFFF00"/>
+                </a:highlight>
+                <a:latin typeface="Times New Roman"/>
+                <a:ea typeface="+mn-lt"/>
+                <a:cs typeface="Times New Roman"/>
+              </a:rPr>
+              <a:t>.</a:t>
+            </a:r>
+          </a:p>
+          <a:p>
+            <a:endParaRPr lang="zh-CN" dirty="0">
               <a:highlight>
                 <a:srgbClr val="FFFF00"/>
               </a:highlight>
@@ -7571,220 +8277,12 @@
           <a:lstStyle/>
           <a:p>
             <a:r>
-              <a:rPr lang="en-US" altLang="zh-CN" sz="2000" b="1" dirty="0">
+              <a:rPr lang="en-US" altLang="zh-CN" sz="2000" b="1">
                 <a:latin typeface="Times New Roman"/>
                 <a:ea typeface="等线"/>
                 <a:cs typeface="Times New Roman"/>
               </a:rPr>
               <a:t>Conclusion</a:t>
-            </a:r>
-            <a:endParaRPr lang="zh-CN" altLang="en-US" b="1" dirty="0">
-              <a:latin typeface="Times New Roman"/>
-              <a:ea typeface="等线"/>
-              <a:cs typeface="Times New Roman"/>
-            </a:endParaRPr>
-          </a:p>
-          <a:p>
-            <a:r>
-              <a:rPr lang="zh-CN" sz="2000">
-                <a:latin typeface="Times New Roman"/>
-                <a:ea typeface="+mn-lt"/>
-                <a:cs typeface="Times New Roman"/>
-              </a:rPr>
-              <a:t>Commercial content partially explains the </a:t>
-            </a:r>
-            <a:r>
-              <a:rPr lang="en-US" altLang="zh-CN" sz="2000" dirty="0">
-                <a:latin typeface="Times New Roman"/>
-                <a:ea typeface="+mn-lt"/>
-                <a:cs typeface="Times New Roman"/>
-              </a:rPr>
-              <a:t>recurring</a:t>
-            </a:r>
-            <a:r>
-              <a:rPr lang="zh-CN" sz="2000" dirty="0">
-                <a:latin typeface="Times New Roman"/>
-                <a:ea typeface="+mn-lt"/>
-                <a:cs typeface="Times New Roman"/>
-              </a:rPr>
-              <a:t> </a:t>
-            </a:r>
-            <a:r>
-              <a:rPr lang="en-US" altLang="zh-CN" sz="2000" dirty="0">
-                <a:latin typeface="Times New Roman"/>
-                <a:ea typeface="+mn-lt"/>
-                <a:cs typeface="Times New Roman"/>
-              </a:rPr>
-              <a:t>sixth-slot</a:t>
-            </a:r>
-            <a:r>
-              <a:rPr lang="zh-CN" sz="2000" dirty="0">
-                <a:latin typeface="Times New Roman"/>
-                <a:ea typeface="+mn-lt"/>
-                <a:cs typeface="Times New Roman"/>
-              </a:rPr>
-              <a:t> </a:t>
-            </a:r>
-            <a:r>
-              <a:rPr lang="en-US" altLang="zh-CN" sz="2000" dirty="0">
-                <a:latin typeface="Times New Roman"/>
-                <a:ea typeface="+mn-lt"/>
-                <a:cs typeface="Times New Roman"/>
-              </a:rPr>
-              <a:t>CTR</a:t>
-            </a:r>
-            <a:r>
-              <a:rPr lang="zh-CN" sz="2000">
-                <a:latin typeface="Times New Roman"/>
-                <a:ea typeface="+mn-lt"/>
-                <a:cs typeface="Times New Roman"/>
-              </a:rPr>
-              <a:t> penalty. </a:t>
-            </a:r>
-            <a:endParaRPr lang="zh-CN">
-              <a:latin typeface="Times New Roman"/>
-              <a:cs typeface="Times New Roman"/>
-            </a:endParaRPr>
-          </a:p>
-          <a:p>
-            <a:r>
-              <a:rPr lang="en-US" altLang="zh-CN" sz="2000" dirty="0">
-                <a:latin typeface="Times New Roman"/>
-                <a:ea typeface="+mn-lt"/>
-                <a:cs typeface="Times New Roman"/>
-              </a:rPr>
-              <a:t>O</a:t>
-            </a:r>
-            <a:r>
-              <a:rPr lang="zh-CN" sz="2000">
-                <a:latin typeface="Times New Roman"/>
-                <a:ea typeface="+mn-lt"/>
-                <a:cs typeface="Times New Roman"/>
-              </a:rPr>
-              <a:t>bservable content </a:t>
-            </a:r>
-            <a:r>
-              <a:rPr lang="en-US" altLang="zh-CN" sz="2000" dirty="0">
-                <a:latin typeface="Times New Roman"/>
-                <a:ea typeface="+mn-lt"/>
-                <a:cs typeface="Times New Roman"/>
-              </a:rPr>
-              <a:t>and</a:t>
-            </a:r>
-            <a:r>
-              <a:rPr lang="zh-CN" sz="2000">
-                <a:latin typeface="Times New Roman"/>
-                <a:ea typeface="+mn-lt"/>
-                <a:cs typeface="Times New Roman"/>
-              </a:rPr>
-              <a:t> user</a:t>
-            </a:r>
-            <a:r>
-              <a:rPr lang="en-US" altLang="zh-CN" sz="2000" dirty="0">
-                <a:latin typeface="Times New Roman"/>
-                <a:ea typeface="+mn-lt"/>
-                <a:cs typeface="Times New Roman"/>
-              </a:rPr>
-              <a:t>-context</a:t>
-            </a:r>
-            <a:r>
-              <a:rPr lang="zh-CN" sz="2000">
-                <a:latin typeface="Times New Roman"/>
-                <a:ea typeface="+mn-lt"/>
-                <a:cs typeface="Times New Roman"/>
-              </a:rPr>
-              <a:t> factors do not fully explain </a:t>
-            </a:r>
-            <a:r>
-              <a:rPr lang="en-US" altLang="zh-CN" sz="2000" dirty="0" err="1">
-                <a:latin typeface="Times New Roman"/>
-                <a:ea typeface="+mn-lt"/>
-                <a:cs typeface="Times New Roman"/>
-              </a:rPr>
-              <a:t>i</a:t>
-            </a:r>
-            <a:r>
-              <a:rPr lang="zh-CN" sz="2000">
-                <a:latin typeface="Times New Roman"/>
-                <a:ea typeface="+mn-lt"/>
-                <a:cs typeface="Times New Roman"/>
-              </a:rPr>
-              <a:t>t. </a:t>
-            </a:r>
-            <a:endParaRPr lang="zh-CN">
-              <a:latin typeface="Times New Roman"/>
-              <a:cs typeface="Times New Roman"/>
-            </a:endParaRPr>
-          </a:p>
-          <a:p>
-            <a:r>
-              <a:rPr lang="en-US" altLang="zh-CN" sz="2000" dirty="0">
-                <a:latin typeface="Times New Roman"/>
-                <a:ea typeface="+mn-lt"/>
-                <a:cs typeface="Times New Roman"/>
-              </a:rPr>
-              <a:t>S</a:t>
-            </a:r>
-            <a:r>
-              <a:rPr lang="zh-CN" sz="2000">
-                <a:latin typeface="Times New Roman"/>
-                <a:ea typeface="+mn-lt"/>
-                <a:cs typeface="Times New Roman"/>
-              </a:rPr>
-              <a:t>ixth-slot candidates show weaker </a:t>
-            </a:r>
-            <a:r>
-              <a:rPr lang="en-US" altLang="zh-CN" sz="2000" dirty="0">
-                <a:latin typeface="Times New Roman"/>
-                <a:ea typeface="+mn-lt"/>
-                <a:cs typeface="Times New Roman"/>
-              </a:rPr>
-              <a:t>position-adjusted,</a:t>
-            </a:r>
-            <a:r>
-              <a:rPr lang="zh-CN" sz="2000">
-                <a:latin typeface="Times New Roman"/>
-                <a:ea typeface="+mn-lt"/>
-                <a:cs typeface="Times New Roman"/>
-              </a:rPr>
-              <a:t> out-of-sample performance than neighboring </a:t>
-            </a:r>
-            <a:r>
-              <a:rPr lang="en-US" altLang="zh-CN" sz="2000" dirty="0">
-                <a:latin typeface="Times New Roman"/>
-                <a:ea typeface="+mn-lt"/>
-                <a:cs typeface="Times New Roman"/>
-              </a:rPr>
-              <a:t>candidates.</a:t>
-            </a:r>
-            <a:r>
-              <a:rPr lang="zh-CN" sz="2000" dirty="0">
-                <a:latin typeface="Times New Roman"/>
-                <a:ea typeface="+mn-lt"/>
-                <a:cs typeface="Times New Roman"/>
-              </a:rPr>
-              <a:t> </a:t>
-            </a:r>
-            <a:endParaRPr lang="zh-CN" dirty="0">
-              <a:latin typeface="Times New Roman"/>
-              <a:cs typeface="Times New Roman"/>
-            </a:endParaRPr>
-          </a:p>
-          <a:p>
-            <a:endParaRPr lang="zh-CN" altLang="en-US" sz="2000" dirty="0">
-              <a:latin typeface="Times New Roman"/>
-              <a:ea typeface="+mn-lt"/>
-              <a:cs typeface="Times New Roman"/>
-            </a:endParaRPr>
-          </a:p>
-          <a:p>
-            <a:r>
-              <a:rPr lang="en-US" altLang="zh-CN" sz="2000" b="1" dirty="0">
-                <a:latin typeface="Times New Roman"/>
-                <a:ea typeface="+mn-lt"/>
-                <a:cs typeface="Times New Roman"/>
-              </a:rPr>
-              <a:t>Implication</a:t>
             </a:r>
             <a:endParaRPr lang="zh-CN" altLang="en-US" b="1">
               <a:latin typeface="Times New Roman"/>
@@ -7794,15 +8292,23 @@
           </a:p>
           <a:p>
             <a:r>
-              <a:rPr lang="en-US" altLang="zh-CN" sz="2000" dirty="0">
-                <a:latin typeface="Times New Roman"/>
-                <a:ea typeface="+mn-lt"/>
-                <a:cs typeface="Times New Roman"/>
-              </a:rPr>
-              <a:t>The</a:t>
-            </a:r>
-            <a:r>
-              <a:rPr lang="zh-CN" sz="2000" dirty="0">
+              <a:rPr lang="zh-CN" sz="2000">
+                <a:latin typeface="Times New Roman"/>
+                <a:ea typeface="+mn-lt"/>
+                <a:cs typeface="Times New Roman"/>
+              </a:rPr>
+              <a:t>Commercial content partially explains the </a:t>
+            </a:r>
+            <a:r>
+              <a:rPr lang="en-US" altLang="zh-CN" sz="2000">
+                <a:latin typeface="Times New Roman"/>
+                <a:ea typeface="+mn-lt"/>
+                <a:cs typeface="Times New Roman"/>
+              </a:rPr>
+              <a:t>recurring</a:t>
+            </a:r>
+            <a:r>
+              <a:rPr lang="zh-CN" sz="2000">
                 <a:latin typeface="Times New Roman"/>
                 <a:ea typeface="+mn-lt"/>
                 <a:cs typeface="Times New Roman"/>
@@ -7810,15 +8316,15 @@
               <a:t> </a:t>
             </a:r>
             <a:r>
-              <a:rPr lang="en-US" altLang="zh-CN" sz="2000" dirty="0">
-                <a:latin typeface="Times New Roman"/>
-                <a:ea typeface="+mn-lt"/>
-                <a:cs typeface="Times New Roman"/>
-              </a:rPr>
-              <a:t>issue</a:t>
-            </a:r>
-            <a:r>
-              <a:rPr lang="zh-CN" sz="2000" dirty="0">
+              <a:rPr lang="en-US" altLang="zh-CN" sz="2000">
+                <a:latin typeface="Times New Roman"/>
+                <a:ea typeface="+mn-lt"/>
+                <a:cs typeface="Times New Roman"/>
+              </a:rPr>
+              <a:t>sixth-slot</a:t>
+            </a:r>
+            <a:r>
+              <a:rPr lang="zh-CN" sz="2000">
                 <a:latin typeface="Times New Roman"/>
                 <a:ea typeface="+mn-lt"/>
                 <a:cs typeface="Times New Roman"/>
@@ -7826,60 +8332,12 @@
               <a:t> </a:t>
             </a:r>
             <a:r>
-              <a:rPr lang="en-US" altLang="zh-CN" sz="2000" dirty="0">
-                <a:latin typeface="Times New Roman"/>
-                <a:ea typeface="+mn-lt"/>
-                <a:cs typeface="Times New Roman"/>
-              </a:rPr>
-              <a:t>may</a:t>
-            </a:r>
-            <a:r>
-              <a:rPr lang="zh-CN" sz="2000" dirty="0">
-                <a:latin typeface="Times New Roman"/>
-                <a:ea typeface="+mn-lt"/>
-                <a:cs typeface="Times New Roman"/>
-              </a:rPr>
-              <a:t> </a:t>
-            </a:r>
-            <a:r>
-              <a:rPr lang="en-US" altLang="zh-CN" sz="2000" dirty="0">
-                <a:latin typeface="Times New Roman"/>
-                <a:ea typeface="+mn-lt"/>
-                <a:cs typeface="Times New Roman"/>
-              </a:rPr>
-              <a:t>involve</a:t>
-            </a:r>
-            <a:r>
-              <a:rPr lang="zh-CN" sz="2000" dirty="0">
-                <a:latin typeface="Times New Roman"/>
-                <a:ea typeface="+mn-lt"/>
-                <a:cs typeface="Times New Roman"/>
-              </a:rPr>
-              <a:t> </a:t>
-            </a:r>
-            <a:r>
-              <a:rPr lang="en-US" altLang="zh-CN" sz="2000" dirty="0">
-                <a:latin typeface="Times New Roman"/>
-                <a:ea typeface="+mn-lt"/>
-                <a:cs typeface="Times New Roman"/>
-              </a:rPr>
-              <a:t>the</a:t>
-            </a:r>
-            <a:r>
-              <a:rPr lang="zh-CN" sz="2000" dirty="0">
-                <a:latin typeface="Times New Roman"/>
-                <a:ea typeface="+mn-lt"/>
-                <a:cs typeface="Times New Roman"/>
-              </a:rPr>
-              <a:t> </a:t>
-            </a:r>
-            <a:r>
-              <a:rPr lang="en-US" altLang="zh-CN" sz="2000" dirty="0">
-                <a:latin typeface="Times New Roman"/>
-                <a:ea typeface="+mn-lt"/>
-                <a:cs typeface="Times New Roman"/>
-              </a:rPr>
-              <a:t>candidate</a:t>
+              <a:rPr lang="en-US" altLang="zh-CN" sz="2000">
+                <a:latin typeface="Times New Roman"/>
+                <a:ea typeface="+mn-lt"/>
+                <a:cs typeface="Times New Roman"/>
+              </a:rPr>
+              <a:t>CTR</a:t>
             </a:r>
             <a:r>
               <a:rPr lang="zh-CN" sz="2000">
@@ -7887,397 +8345,7 @@
                 <a:ea typeface="+mn-lt"/>
                 <a:cs typeface="Times New Roman"/>
               </a:rPr>
-              <a:t>-s</a:t>
-            </a:r>
-            <a:r>
-              <a:rPr lang="en-US" altLang="zh-CN" sz="2000" dirty="0">
-                <a:latin typeface="Times New Roman"/>
-                <a:ea typeface="+mn-lt"/>
-                <a:cs typeface="Times New Roman"/>
-              </a:rPr>
-              <a:t>election</a:t>
-            </a:r>
-            <a:r>
-              <a:rPr lang="zh-CN" sz="2000" dirty="0">
-                <a:latin typeface="Times New Roman"/>
-                <a:ea typeface="+mn-lt"/>
-                <a:cs typeface="Times New Roman"/>
-              </a:rPr>
-              <a:t> </a:t>
-            </a:r>
-            <a:r>
-              <a:rPr lang="en-US" altLang="zh-CN" sz="2000" dirty="0">
-                <a:latin typeface="Times New Roman"/>
-                <a:ea typeface="+mn-lt"/>
-                <a:cs typeface="Times New Roman"/>
-              </a:rPr>
-              <a:t>or</a:t>
-            </a:r>
-            <a:r>
-              <a:rPr lang="zh-CN" sz="2000" dirty="0">
-                <a:latin typeface="Times New Roman"/>
-                <a:ea typeface="+mn-lt"/>
-                <a:cs typeface="Times New Roman"/>
-              </a:rPr>
-              <a:t> </a:t>
-            </a:r>
-            <a:r>
-              <a:rPr lang="en-US" altLang="zh-CN" sz="2000" dirty="0">
-                <a:latin typeface="Times New Roman"/>
-                <a:ea typeface="+mn-lt"/>
-                <a:cs typeface="Times New Roman"/>
-              </a:rPr>
-              <a:t>serving</a:t>
-            </a:r>
-            <a:r>
-              <a:rPr lang="zh-CN" sz="2000" dirty="0">
-                <a:latin typeface="Times New Roman"/>
-                <a:ea typeface="+mn-lt"/>
-                <a:cs typeface="Times New Roman"/>
-              </a:rPr>
-              <a:t> </a:t>
-            </a:r>
-            <a:r>
-              <a:rPr lang="en-US" altLang="zh-CN" sz="2000" dirty="0">
-                <a:latin typeface="Times New Roman"/>
-                <a:ea typeface="+mn-lt"/>
-                <a:cs typeface="Times New Roman"/>
-              </a:rPr>
-              <a:t>mechanism,</a:t>
-            </a:r>
-            <a:r>
-              <a:rPr lang="zh-CN" sz="2000" dirty="0">
-                <a:latin typeface="Times New Roman"/>
-                <a:ea typeface="+mn-lt"/>
-                <a:cs typeface="Times New Roman"/>
-              </a:rPr>
-              <a:t> </a:t>
-            </a:r>
-            <a:r>
-              <a:rPr lang="en-US" altLang="zh-CN" sz="2000" dirty="0">
-                <a:latin typeface="Times New Roman"/>
-                <a:ea typeface="+mn-lt"/>
-                <a:cs typeface="Times New Roman"/>
-              </a:rPr>
-              <a:t>not</a:t>
-            </a:r>
-            <a:r>
-              <a:rPr lang="zh-CN" sz="2000" dirty="0">
-                <a:latin typeface="Times New Roman"/>
-                <a:ea typeface="+mn-lt"/>
-                <a:cs typeface="Times New Roman"/>
-              </a:rPr>
-              <a:t> </a:t>
-            </a:r>
-            <a:r>
-              <a:rPr lang="en-US" altLang="zh-CN" sz="2000" dirty="0">
-                <a:latin typeface="Times New Roman"/>
-                <a:ea typeface="+mn-lt"/>
-                <a:cs typeface="Times New Roman"/>
-              </a:rPr>
-              <a:t>only</a:t>
-            </a:r>
-            <a:r>
-              <a:rPr lang="zh-CN" sz="2000" dirty="0">
-                <a:latin typeface="Times New Roman"/>
-                <a:ea typeface="+mn-lt"/>
-                <a:cs typeface="Times New Roman"/>
-              </a:rPr>
-              <a:t> </a:t>
-            </a:r>
-            <a:r>
-              <a:rPr lang="en-US" altLang="zh-CN" sz="2000" dirty="0">
-                <a:latin typeface="Times New Roman"/>
-                <a:ea typeface="+mn-lt"/>
-                <a:cs typeface="Times New Roman"/>
-              </a:rPr>
-              <a:t>ad</a:t>
-            </a:r>
-            <a:r>
-              <a:rPr lang="zh-CN" sz="2000" dirty="0">
-                <a:latin typeface="Times New Roman"/>
-                <a:ea typeface="+mn-lt"/>
-                <a:cs typeface="Times New Roman"/>
-              </a:rPr>
-              <a:t> </a:t>
-            </a:r>
-            <a:r>
-              <a:rPr lang="en-US" altLang="zh-CN" sz="2000" dirty="0">
-                <a:latin typeface="Times New Roman"/>
-                <a:ea typeface="+mn-lt"/>
-                <a:cs typeface="Times New Roman"/>
-              </a:rPr>
-              <a:t>exposure.</a:t>
-            </a:r>
-            <a:r>
-              <a:rPr lang="zh-CN" sz="2000" dirty="0">
-                <a:latin typeface="Times New Roman"/>
-                <a:ea typeface="+mn-lt"/>
-                <a:cs typeface="Times New Roman"/>
-              </a:rPr>
-              <a:t> </a:t>
-            </a:r>
-            <a:endParaRPr lang="zh-CN" dirty="0">
-              <a:latin typeface="Times New Roman"/>
-              <a:cs typeface="Times New Roman"/>
-            </a:endParaRPr>
-          </a:p>
-          <a:p>
-            <a:r>
-              <a:rPr lang="en-US" altLang="zh-CN" sz="2000" dirty="0">
-                <a:latin typeface="Times New Roman"/>
-                <a:ea typeface="+mn-lt"/>
-                <a:cs typeface="Times New Roman"/>
-              </a:rPr>
-              <a:t>Product</a:t>
-            </a:r>
-            <a:r>
-              <a:rPr lang="zh-CN" sz="2000" dirty="0">
-                <a:latin typeface="Times New Roman"/>
-                <a:ea typeface="+mn-lt"/>
-                <a:cs typeface="Times New Roman"/>
-              </a:rPr>
-              <a:t> </a:t>
-            </a:r>
-            <a:r>
-              <a:rPr lang="en-US" altLang="zh-CN" sz="2000" dirty="0">
-                <a:latin typeface="Times New Roman"/>
-                <a:ea typeface="+mn-lt"/>
-                <a:cs typeface="Times New Roman"/>
-              </a:rPr>
-              <a:t>teams</a:t>
-            </a:r>
-            <a:r>
-              <a:rPr lang="zh-CN" sz="2000" dirty="0">
-                <a:latin typeface="Times New Roman"/>
-                <a:ea typeface="+mn-lt"/>
-                <a:cs typeface="Times New Roman"/>
-              </a:rPr>
-              <a:t> </a:t>
-            </a:r>
-            <a:r>
-              <a:rPr lang="en-US" altLang="zh-CN" sz="2000" dirty="0">
-                <a:latin typeface="Times New Roman"/>
-                <a:ea typeface="+mn-lt"/>
-                <a:cs typeface="Times New Roman"/>
-              </a:rPr>
-              <a:t>could</a:t>
-            </a:r>
-            <a:r>
-              <a:rPr lang="zh-CN" sz="2000" dirty="0">
-                <a:latin typeface="Times New Roman"/>
-                <a:ea typeface="+mn-lt"/>
-                <a:cs typeface="Times New Roman"/>
-              </a:rPr>
-              <a:t> </a:t>
-            </a:r>
-            <a:r>
-              <a:rPr lang="en-US" altLang="zh-CN" sz="2000" dirty="0">
-                <a:latin typeface="Times New Roman"/>
-                <a:ea typeface="+mn-lt"/>
-                <a:cs typeface="Times New Roman"/>
-              </a:rPr>
-              <a:t>audit</a:t>
-            </a:r>
-            <a:r>
-              <a:rPr lang="zh-CN" sz="2000" dirty="0">
-                <a:latin typeface="Times New Roman"/>
-                <a:ea typeface="+mn-lt"/>
-                <a:cs typeface="Times New Roman"/>
-              </a:rPr>
-              <a:t> </a:t>
-            </a:r>
-            <a:r>
-              <a:rPr lang="en-US" altLang="zh-CN" sz="2000" dirty="0">
-                <a:latin typeface="Times New Roman"/>
-                <a:ea typeface="+mn-lt"/>
-                <a:cs typeface="Times New Roman"/>
-              </a:rPr>
-              <a:t>these</a:t>
-            </a:r>
-            <a:r>
-              <a:rPr lang="zh-CN" sz="2000" dirty="0">
-                <a:latin typeface="Times New Roman"/>
-                <a:ea typeface="+mn-lt"/>
-                <a:cs typeface="Times New Roman"/>
-              </a:rPr>
-              <a:t> </a:t>
-            </a:r>
-            <a:r>
-              <a:rPr lang="en-US" altLang="zh-CN" sz="2000" dirty="0">
-                <a:latin typeface="Times New Roman"/>
-                <a:ea typeface="+mn-lt"/>
-                <a:cs typeface="Times New Roman"/>
-              </a:rPr>
-              <a:t>s</a:t>
-            </a:r>
-            <a:r>
-              <a:rPr lang="zh-CN" sz="2000">
-                <a:latin typeface="Times New Roman"/>
-                <a:ea typeface="+mn-lt"/>
-                <a:cs typeface="Times New Roman"/>
-              </a:rPr>
-              <a:t>lot</a:t>
-            </a:r>
-            <a:r>
-              <a:rPr lang="en-US" altLang="zh-CN" sz="2000" dirty="0">
-                <a:latin typeface="Times New Roman"/>
-                <a:ea typeface="+mn-lt"/>
-                <a:cs typeface="Times New Roman"/>
-              </a:rPr>
-              <a:t>s</a:t>
-            </a:r>
-            <a:r>
-              <a:rPr lang="zh-CN" sz="2000" dirty="0">
-                <a:latin typeface="Times New Roman"/>
-                <a:ea typeface="+mn-lt"/>
-                <a:cs typeface="Times New Roman"/>
-              </a:rPr>
-              <a:t> </a:t>
-            </a:r>
-            <a:r>
-              <a:rPr lang="en-US" altLang="zh-CN" sz="2000" dirty="0">
-                <a:latin typeface="Times New Roman"/>
-                <a:ea typeface="+mn-lt"/>
-                <a:cs typeface="Times New Roman"/>
-              </a:rPr>
-              <a:t>and</a:t>
-            </a:r>
-            <a:r>
-              <a:rPr lang="zh-CN" sz="2000" dirty="0">
-                <a:latin typeface="Times New Roman"/>
-                <a:ea typeface="+mn-lt"/>
-                <a:cs typeface="Times New Roman"/>
-              </a:rPr>
-              <a:t> </a:t>
-            </a:r>
-            <a:r>
-              <a:rPr lang="en-US" altLang="zh-CN" sz="2000" dirty="0">
-                <a:latin typeface="Times New Roman"/>
-                <a:ea typeface="+mn-lt"/>
-                <a:cs typeface="Times New Roman"/>
-              </a:rPr>
-              <a:t>use</a:t>
-            </a:r>
-            <a:r>
-              <a:rPr lang="zh-CN" sz="2000" dirty="0">
-                <a:latin typeface="Times New Roman"/>
-                <a:ea typeface="+mn-lt"/>
-                <a:cs typeface="Times New Roman"/>
-              </a:rPr>
-              <a:t> </a:t>
-            </a:r>
-            <a:r>
-              <a:rPr lang="en-US" altLang="zh-CN" sz="2000" dirty="0">
-                <a:latin typeface="Times New Roman"/>
-                <a:ea typeface="+mn-lt"/>
-                <a:cs typeface="Times New Roman"/>
-              </a:rPr>
-              <a:t>A/B</a:t>
-            </a:r>
-            <a:r>
-              <a:rPr lang="zh-CN" sz="2000" dirty="0">
-                <a:latin typeface="Times New Roman"/>
-                <a:ea typeface="+mn-lt"/>
-                <a:cs typeface="Times New Roman"/>
-              </a:rPr>
-              <a:t> </a:t>
-            </a:r>
-            <a:r>
-              <a:rPr lang="en-US" altLang="zh-CN" sz="2000" dirty="0">
-                <a:latin typeface="Times New Roman"/>
-                <a:ea typeface="+mn-lt"/>
-                <a:cs typeface="Times New Roman"/>
-              </a:rPr>
-              <a:t>tests</a:t>
-            </a:r>
-            <a:r>
-              <a:rPr lang="zh-CN" sz="2000" dirty="0">
-                <a:latin typeface="Times New Roman"/>
-                <a:ea typeface="+mn-lt"/>
-                <a:cs typeface="Times New Roman"/>
-              </a:rPr>
-              <a:t> </a:t>
-            </a:r>
-            <a:r>
-              <a:rPr lang="en-US" altLang="zh-CN" sz="2000" dirty="0">
-                <a:latin typeface="Times New Roman"/>
-                <a:ea typeface="+mn-lt"/>
-                <a:cs typeface="Times New Roman"/>
-              </a:rPr>
-              <a:t>to</a:t>
-            </a:r>
-            <a:r>
-              <a:rPr lang="zh-CN" sz="2000" dirty="0">
-                <a:latin typeface="Times New Roman"/>
-                <a:ea typeface="+mn-lt"/>
-                <a:cs typeface="Times New Roman"/>
-              </a:rPr>
-              <a:t> </a:t>
-            </a:r>
-            <a:r>
-              <a:rPr lang="en-US" altLang="zh-CN" sz="2000" dirty="0">
-                <a:latin typeface="Times New Roman"/>
-                <a:ea typeface="+mn-lt"/>
-                <a:cs typeface="Times New Roman"/>
-              </a:rPr>
-              <a:t>evaluate</a:t>
-            </a:r>
-            <a:r>
-              <a:rPr lang="zh-CN" sz="2000" dirty="0">
-                <a:latin typeface="Times New Roman"/>
-                <a:ea typeface="+mn-lt"/>
-                <a:cs typeface="Times New Roman"/>
-              </a:rPr>
-              <a:t> </a:t>
-            </a:r>
-            <a:r>
-              <a:rPr lang="en-US" altLang="zh-CN" sz="2000" dirty="0">
-                <a:latin typeface="Times New Roman"/>
-                <a:ea typeface="+mn-lt"/>
-                <a:cs typeface="Times New Roman"/>
-              </a:rPr>
-              <a:t>alternative</a:t>
-            </a:r>
-            <a:r>
-              <a:rPr lang="zh-CN" sz="2000">
-                <a:latin typeface="Times New Roman"/>
-                <a:ea typeface="+mn-lt"/>
-                <a:cs typeface="Times New Roman"/>
-              </a:rPr>
-              <a:t> candidate</a:t>
-            </a:r>
-            <a:r>
-              <a:rPr lang="en-US" altLang="zh-CN" sz="2000" dirty="0">
-                <a:latin typeface="Times New Roman"/>
-                <a:ea typeface="+mn-lt"/>
-                <a:cs typeface="Times New Roman"/>
-              </a:rPr>
-              <a:t>-selection</a:t>
-            </a:r>
-            <a:r>
-              <a:rPr lang="zh-CN" sz="2000" dirty="0">
-                <a:latin typeface="Times New Roman"/>
-                <a:ea typeface="+mn-lt"/>
-                <a:cs typeface="Times New Roman"/>
-              </a:rPr>
-              <a:t> </a:t>
-            </a:r>
-            <a:r>
-              <a:rPr lang="en-US" altLang="zh-CN" sz="2000" dirty="0" err="1">
-                <a:latin typeface="Times New Roman"/>
-                <a:ea typeface="+mn-lt"/>
-                <a:cs typeface="Times New Roman"/>
-              </a:rPr>
-              <a:t>strategie</a:t>
-            </a:r>
-            <a:r>
-              <a:rPr lang="zh-CN" sz="2000">
-                <a:latin typeface="Times New Roman"/>
-                <a:ea typeface="+mn-lt"/>
-                <a:cs typeface="Times New Roman"/>
-              </a:rPr>
-              <a:t>s.</a:t>
+              <a:t> penalty. </a:t>
             </a:r>
             <a:endParaRPr lang="zh-CN">
               <a:latin typeface="Times New Roman"/>
@@ -8285,7 +8353,601 @@
             </a:endParaRPr>
           </a:p>
           <a:p>
-            <a:endParaRPr lang="zh-CN" sz="2000" dirty="0">
+            <a:r>
+              <a:rPr lang="en-US" altLang="zh-CN" sz="2000">
+                <a:latin typeface="Times New Roman"/>
+                <a:ea typeface="+mn-lt"/>
+                <a:cs typeface="Times New Roman"/>
+              </a:rPr>
+              <a:t>O</a:t>
+            </a:r>
+            <a:r>
+              <a:rPr lang="zh-CN" sz="2000">
+                <a:latin typeface="Times New Roman"/>
+                <a:ea typeface="+mn-lt"/>
+                <a:cs typeface="Times New Roman"/>
+              </a:rPr>
+              <a:t>bservable content </a:t>
+            </a:r>
+            <a:r>
+              <a:rPr lang="en-US" altLang="zh-CN" sz="2000">
+                <a:latin typeface="Times New Roman"/>
+                <a:ea typeface="+mn-lt"/>
+                <a:cs typeface="Times New Roman"/>
+              </a:rPr>
+              <a:t>and</a:t>
+            </a:r>
+            <a:r>
+              <a:rPr lang="zh-CN" sz="2000">
+                <a:latin typeface="Times New Roman"/>
+                <a:ea typeface="+mn-lt"/>
+                <a:cs typeface="Times New Roman"/>
+              </a:rPr>
+              <a:t> user</a:t>
+            </a:r>
+            <a:r>
+              <a:rPr lang="en-US" altLang="zh-CN" sz="2000">
+                <a:latin typeface="Times New Roman"/>
+                <a:ea typeface="+mn-lt"/>
+                <a:cs typeface="Times New Roman"/>
+              </a:rPr>
+              <a:t>-context</a:t>
+            </a:r>
+            <a:r>
+              <a:rPr lang="zh-CN" sz="2000">
+                <a:latin typeface="Times New Roman"/>
+                <a:ea typeface="+mn-lt"/>
+                <a:cs typeface="Times New Roman"/>
+              </a:rPr>
+              <a:t> factors do not fully explain </a:t>
+            </a:r>
+            <a:r>
+              <a:rPr lang="en-US" altLang="zh-CN" sz="2000" err="1">
+                <a:latin typeface="Times New Roman"/>
+                <a:ea typeface="+mn-lt"/>
+                <a:cs typeface="Times New Roman"/>
+              </a:rPr>
+              <a:t>i</a:t>
+            </a:r>
+            <a:r>
+              <a:rPr lang="zh-CN" sz="2000">
+                <a:latin typeface="Times New Roman"/>
+                <a:ea typeface="+mn-lt"/>
+                <a:cs typeface="Times New Roman"/>
+              </a:rPr>
+              <a:t>t. </a:t>
+            </a:r>
+            <a:endParaRPr lang="zh-CN">
+              <a:latin typeface="Times New Roman"/>
+              <a:cs typeface="Times New Roman"/>
+            </a:endParaRPr>
+          </a:p>
+          <a:p>
+            <a:r>
+              <a:rPr lang="zh-CN" altLang="en-US" sz="2000">
+                <a:latin typeface="Times New Roman"/>
+                <a:ea typeface="+mn-lt"/>
+                <a:cs typeface="Times New Roman"/>
+              </a:rPr>
+              <a:t>Candidate selection may also contribute to the CTR penalty.</a:t>
+            </a:r>
+          </a:p>
+          <a:p>
+            <a:endParaRPr lang="zh-CN" altLang="en-US" sz="2000">
+              <a:latin typeface="Times New Roman"/>
+              <a:ea typeface="+mn-lt"/>
+              <a:cs typeface="Times New Roman"/>
+            </a:endParaRPr>
+          </a:p>
+          <a:p>
+            <a:r>
+              <a:rPr lang="en-US" altLang="zh-CN" sz="2000" b="1">
+                <a:latin typeface="Times New Roman"/>
+                <a:ea typeface="+mn-lt"/>
+                <a:cs typeface="Times New Roman"/>
+              </a:rPr>
+              <a:t>Implication</a:t>
+            </a:r>
+            <a:endParaRPr lang="zh-CN" altLang="en-US" b="1">
+              <a:latin typeface="Times New Roman"/>
+              <a:ea typeface="等线"/>
+              <a:cs typeface="Times New Roman"/>
+            </a:endParaRPr>
+          </a:p>
+          <a:p>
+            <a:r>
+              <a:rPr lang="en-US" altLang="zh-CN" sz="2000">
+                <a:latin typeface="Times New Roman"/>
+                <a:ea typeface="+mn-lt"/>
+                <a:cs typeface="Times New Roman"/>
+              </a:rPr>
+              <a:t>The</a:t>
+            </a:r>
+            <a:r>
+              <a:rPr lang="zh-CN" sz="2000">
+                <a:latin typeface="Times New Roman"/>
+                <a:ea typeface="+mn-lt"/>
+                <a:cs typeface="Times New Roman"/>
+              </a:rPr>
+              <a:t> </a:t>
+            </a:r>
+            <a:r>
+              <a:rPr lang="en-US" altLang="zh-CN" sz="2000">
+                <a:latin typeface="Times New Roman"/>
+                <a:ea typeface="+mn-lt"/>
+                <a:cs typeface="Times New Roman"/>
+              </a:rPr>
+              <a:t>issue</a:t>
+            </a:r>
+            <a:r>
+              <a:rPr lang="zh-CN" sz="2000">
+                <a:latin typeface="Times New Roman"/>
+                <a:ea typeface="+mn-lt"/>
+                <a:cs typeface="Times New Roman"/>
+              </a:rPr>
+              <a:t> </a:t>
+            </a:r>
+            <a:r>
+              <a:rPr lang="en-US" altLang="zh-CN" sz="2000">
+                <a:latin typeface="Times New Roman"/>
+                <a:ea typeface="+mn-lt"/>
+                <a:cs typeface="Times New Roman"/>
+              </a:rPr>
+              <a:t>may</a:t>
+            </a:r>
+            <a:r>
+              <a:rPr lang="zh-CN" sz="2000">
+                <a:latin typeface="Times New Roman"/>
+                <a:ea typeface="+mn-lt"/>
+                <a:cs typeface="Times New Roman"/>
+              </a:rPr>
+              <a:t> </a:t>
+            </a:r>
+            <a:r>
+              <a:rPr lang="en-US" altLang="zh-CN" sz="2000">
+                <a:latin typeface="Times New Roman"/>
+                <a:ea typeface="+mn-lt"/>
+                <a:cs typeface="Times New Roman"/>
+              </a:rPr>
+              <a:t>involve</a:t>
+            </a:r>
+            <a:r>
+              <a:rPr lang="zh-CN" sz="2000">
+                <a:latin typeface="Times New Roman"/>
+                <a:ea typeface="+mn-lt"/>
+                <a:cs typeface="Times New Roman"/>
+              </a:rPr>
+              <a:t> </a:t>
+            </a:r>
+            <a:r>
+              <a:rPr lang="en-US" altLang="zh-CN" sz="2000">
+                <a:latin typeface="Times New Roman"/>
+                <a:ea typeface="+mn-lt"/>
+                <a:cs typeface="Times New Roman"/>
+              </a:rPr>
+              <a:t>the</a:t>
+            </a:r>
+            <a:r>
+              <a:rPr lang="zh-CN" sz="2000">
+                <a:latin typeface="Times New Roman"/>
+                <a:ea typeface="+mn-lt"/>
+                <a:cs typeface="Times New Roman"/>
+              </a:rPr>
+              <a:t> </a:t>
+            </a:r>
+            <a:r>
+              <a:rPr lang="en-US" altLang="zh-CN" sz="2000">
+                <a:latin typeface="Times New Roman"/>
+                <a:ea typeface="+mn-lt"/>
+                <a:cs typeface="Times New Roman"/>
+              </a:rPr>
+              <a:t>candidate</a:t>
+            </a:r>
+            <a:r>
+              <a:rPr lang="zh-CN" sz="2000">
+                <a:latin typeface="Times New Roman"/>
+                <a:ea typeface="+mn-lt"/>
+                <a:cs typeface="Times New Roman"/>
+              </a:rPr>
+              <a:t>-s</a:t>
+            </a:r>
+            <a:r>
+              <a:rPr lang="en-US" altLang="zh-CN" sz="2000">
+                <a:latin typeface="Times New Roman"/>
+                <a:ea typeface="+mn-lt"/>
+                <a:cs typeface="Times New Roman"/>
+              </a:rPr>
+              <a:t>election</a:t>
+            </a:r>
+            <a:r>
+              <a:rPr lang="zh-CN" sz="2000">
+                <a:latin typeface="Times New Roman"/>
+                <a:ea typeface="+mn-lt"/>
+                <a:cs typeface="Times New Roman"/>
+              </a:rPr>
+              <a:t> </a:t>
+            </a:r>
+            <a:r>
+              <a:rPr lang="en-US" altLang="zh-CN" sz="2000">
+                <a:latin typeface="Times New Roman"/>
+                <a:ea typeface="+mn-lt"/>
+                <a:cs typeface="Times New Roman"/>
+              </a:rPr>
+              <a:t>or</a:t>
+            </a:r>
+            <a:r>
+              <a:rPr lang="zh-CN" sz="2000">
+                <a:latin typeface="Times New Roman"/>
+                <a:ea typeface="+mn-lt"/>
+                <a:cs typeface="Times New Roman"/>
+              </a:rPr>
+              <a:t> </a:t>
+            </a:r>
+            <a:r>
+              <a:rPr lang="en-US" altLang="zh-CN" sz="2000">
+                <a:latin typeface="Times New Roman"/>
+                <a:ea typeface="+mn-lt"/>
+                <a:cs typeface="Times New Roman"/>
+              </a:rPr>
+              <a:t>serving</a:t>
+            </a:r>
+            <a:r>
+              <a:rPr lang="zh-CN" sz="2000">
+                <a:latin typeface="Times New Roman"/>
+                <a:ea typeface="+mn-lt"/>
+                <a:cs typeface="Times New Roman"/>
+              </a:rPr>
+              <a:t> </a:t>
+            </a:r>
+            <a:r>
+              <a:rPr lang="en-US" altLang="zh-CN" sz="2000">
+                <a:latin typeface="Times New Roman"/>
+                <a:ea typeface="+mn-lt"/>
+                <a:cs typeface="Times New Roman"/>
+              </a:rPr>
+              <a:t>mechanism,</a:t>
+            </a:r>
+            <a:r>
+              <a:rPr lang="zh-CN" sz="2000">
+                <a:latin typeface="Times New Roman"/>
+                <a:ea typeface="+mn-lt"/>
+                <a:cs typeface="Times New Roman"/>
+              </a:rPr>
+              <a:t> </a:t>
+            </a:r>
+            <a:r>
+              <a:rPr lang="en-US" altLang="zh-CN" sz="2000">
+                <a:latin typeface="Times New Roman"/>
+                <a:ea typeface="+mn-lt"/>
+                <a:cs typeface="Times New Roman"/>
+              </a:rPr>
+              <a:t>not</a:t>
+            </a:r>
+            <a:r>
+              <a:rPr lang="zh-CN" sz="2000">
+                <a:latin typeface="Times New Roman"/>
+                <a:ea typeface="+mn-lt"/>
+                <a:cs typeface="Times New Roman"/>
+              </a:rPr>
+              <a:t> </a:t>
+            </a:r>
+            <a:r>
+              <a:rPr lang="en-US" altLang="zh-CN" sz="2000">
+                <a:latin typeface="Times New Roman"/>
+                <a:ea typeface="+mn-lt"/>
+                <a:cs typeface="Times New Roman"/>
+              </a:rPr>
+              <a:t>only</a:t>
+            </a:r>
+            <a:r>
+              <a:rPr lang="zh-CN" sz="2000">
+                <a:latin typeface="Times New Roman"/>
+                <a:ea typeface="+mn-lt"/>
+                <a:cs typeface="Times New Roman"/>
+              </a:rPr>
+              <a:t> </a:t>
+            </a:r>
+            <a:r>
+              <a:rPr lang="en-US" altLang="zh-CN" sz="2000">
+                <a:latin typeface="Times New Roman"/>
+                <a:ea typeface="+mn-lt"/>
+                <a:cs typeface="Times New Roman"/>
+              </a:rPr>
+              <a:t>ad</a:t>
+            </a:r>
+            <a:r>
+              <a:rPr lang="zh-CN" sz="2000">
+                <a:latin typeface="Times New Roman"/>
+                <a:ea typeface="+mn-lt"/>
+                <a:cs typeface="Times New Roman"/>
+              </a:rPr>
+              <a:t> </a:t>
+            </a:r>
+            <a:r>
+              <a:rPr lang="en-US" altLang="zh-CN" sz="2000">
+                <a:latin typeface="Times New Roman"/>
+                <a:ea typeface="+mn-lt"/>
+                <a:cs typeface="Times New Roman"/>
+              </a:rPr>
+              <a:t>exposure.</a:t>
+            </a:r>
+            <a:r>
+              <a:rPr lang="zh-CN" sz="2000">
+                <a:latin typeface="Times New Roman"/>
+                <a:ea typeface="+mn-lt"/>
+                <a:cs typeface="Times New Roman"/>
+              </a:rPr>
+              <a:t> </a:t>
+            </a:r>
+            <a:endParaRPr lang="zh-CN">
+              <a:latin typeface="Times New Roman"/>
+              <a:cs typeface="Times New Roman"/>
+            </a:endParaRPr>
+          </a:p>
+          <a:p>
+            <a:r>
+              <a:rPr lang="en-US" altLang="zh-CN" sz="2000" dirty="0">
+                <a:latin typeface="Times New Roman"/>
+                <a:ea typeface="+mn-lt"/>
+                <a:cs typeface="Times New Roman"/>
+              </a:rPr>
+              <a:t>Product</a:t>
+            </a:r>
+            <a:r>
+              <a:rPr lang="zh-CN" sz="2000" dirty="0">
+                <a:latin typeface="Times New Roman"/>
+                <a:ea typeface="+mn-lt"/>
+                <a:cs typeface="Times New Roman"/>
+              </a:rPr>
+              <a:t> </a:t>
+            </a:r>
+            <a:r>
+              <a:rPr lang="en-US" altLang="zh-CN" sz="2000" dirty="0">
+                <a:latin typeface="Times New Roman"/>
+                <a:ea typeface="+mn-lt"/>
+                <a:cs typeface="Times New Roman"/>
+              </a:rPr>
+              <a:t>teams</a:t>
+            </a:r>
+            <a:r>
+              <a:rPr lang="zh-CN" sz="2000" dirty="0">
+                <a:latin typeface="Times New Roman"/>
+                <a:ea typeface="+mn-lt"/>
+                <a:cs typeface="Times New Roman"/>
+              </a:rPr>
+              <a:t> </a:t>
+            </a:r>
+            <a:r>
+              <a:rPr lang="en-US" altLang="zh-CN" sz="2000" dirty="0">
+                <a:latin typeface="Times New Roman"/>
+                <a:ea typeface="+mn-lt"/>
+                <a:cs typeface="Times New Roman"/>
+              </a:rPr>
+              <a:t>could</a:t>
+            </a:r>
+            <a:r>
+              <a:rPr lang="zh-CN" sz="2000" dirty="0">
+                <a:latin typeface="Times New Roman"/>
+                <a:ea typeface="+mn-lt"/>
+                <a:cs typeface="Times New Roman"/>
+              </a:rPr>
+              <a:t> </a:t>
+            </a:r>
+            <a:r>
+              <a:rPr lang="en-US" altLang="zh-CN" sz="2000" dirty="0">
+                <a:latin typeface="Times New Roman"/>
+                <a:ea typeface="+mn-lt"/>
+                <a:cs typeface="Times New Roman"/>
+              </a:rPr>
+              <a:t>audit</a:t>
+            </a:r>
+            <a:r>
+              <a:rPr lang="zh-CN" sz="2000" dirty="0">
+                <a:latin typeface="Times New Roman"/>
+                <a:ea typeface="+mn-lt"/>
+                <a:cs typeface="Times New Roman"/>
+              </a:rPr>
+              <a:t> </a:t>
+            </a:r>
+            <a:r>
+              <a:rPr lang="en-US" altLang="zh-CN" sz="2000" dirty="0">
+                <a:latin typeface="Times New Roman"/>
+                <a:ea typeface="+mn-lt"/>
+                <a:cs typeface="Times New Roman"/>
+              </a:rPr>
+              <a:t>these</a:t>
+            </a:r>
+            <a:r>
+              <a:rPr lang="zh-CN" sz="2000" dirty="0">
+                <a:latin typeface="Times New Roman"/>
+                <a:ea typeface="+mn-lt"/>
+                <a:cs typeface="Times New Roman"/>
+              </a:rPr>
+              <a:t> </a:t>
+            </a:r>
+            <a:r>
+              <a:rPr lang="en-US" altLang="zh-CN" sz="2000" dirty="0">
+                <a:latin typeface="Times New Roman"/>
+                <a:ea typeface="+mn-lt"/>
+                <a:cs typeface="Times New Roman"/>
+              </a:rPr>
+              <a:t>s</a:t>
+            </a:r>
+            <a:r>
+              <a:rPr lang="zh-CN" sz="2000">
+                <a:latin typeface="Times New Roman"/>
+                <a:ea typeface="+mn-lt"/>
+                <a:cs typeface="Times New Roman"/>
+              </a:rPr>
+              <a:t>lot</a:t>
+            </a:r>
+            <a:r>
+              <a:rPr lang="en-US" altLang="zh-CN" sz="2000" dirty="0">
+                <a:latin typeface="Times New Roman"/>
+                <a:ea typeface="+mn-lt"/>
+                <a:cs typeface="Times New Roman"/>
+              </a:rPr>
+              <a:t>s</a:t>
+            </a:r>
+            <a:r>
+              <a:rPr lang="zh-CN" sz="2000" dirty="0">
+                <a:latin typeface="Times New Roman"/>
+                <a:ea typeface="+mn-lt"/>
+                <a:cs typeface="Times New Roman"/>
+              </a:rPr>
+              <a:t> </a:t>
+            </a:r>
+            <a:r>
+              <a:rPr lang="en-US" altLang="zh-CN" sz="2000" dirty="0">
+                <a:latin typeface="Times New Roman"/>
+                <a:ea typeface="+mn-lt"/>
+                <a:cs typeface="Times New Roman"/>
+              </a:rPr>
+              <a:t>and</a:t>
+            </a:r>
+            <a:r>
+              <a:rPr lang="zh-CN" sz="2000" dirty="0">
+                <a:latin typeface="Times New Roman"/>
+                <a:ea typeface="+mn-lt"/>
+                <a:cs typeface="Times New Roman"/>
+              </a:rPr>
+              <a:t> </a:t>
+            </a:r>
+            <a:r>
+              <a:rPr lang="en-US" altLang="zh-CN" sz="2000" dirty="0">
+                <a:latin typeface="Times New Roman"/>
+                <a:ea typeface="+mn-lt"/>
+                <a:cs typeface="Times New Roman"/>
+              </a:rPr>
+              <a:t>use</a:t>
+            </a:r>
+            <a:r>
+              <a:rPr lang="zh-CN" sz="2000" dirty="0">
+                <a:latin typeface="Times New Roman"/>
+                <a:ea typeface="+mn-lt"/>
+                <a:cs typeface="Times New Roman"/>
+              </a:rPr>
+              <a:t> </a:t>
+            </a:r>
+            <a:r>
+              <a:rPr lang="en-US" altLang="zh-CN" sz="2000" dirty="0">
+                <a:latin typeface="Times New Roman"/>
+                <a:ea typeface="+mn-lt"/>
+                <a:cs typeface="Times New Roman"/>
+              </a:rPr>
+              <a:t>A/B</a:t>
+            </a:r>
+            <a:r>
+              <a:rPr lang="zh-CN" sz="2000" dirty="0">
+                <a:latin typeface="Times New Roman"/>
+                <a:ea typeface="+mn-lt"/>
+                <a:cs typeface="Times New Roman"/>
+              </a:rPr>
+              <a:t> </a:t>
+            </a:r>
+            <a:r>
+              <a:rPr lang="en-US" altLang="zh-CN" sz="2000" dirty="0">
+                <a:latin typeface="Times New Roman"/>
+                <a:ea typeface="+mn-lt"/>
+                <a:cs typeface="Times New Roman"/>
+              </a:rPr>
+              <a:t>tests</a:t>
+            </a:r>
+            <a:r>
+              <a:rPr lang="zh-CN" sz="2000" dirty="0">
+                <a:latin typeface="Times New Roman"/>
+                <a:ea typeface="+mn-lt"/>
+                <a:cs typeface="Times New Roman"/>
+              </a:rPr>
+              <a:t> </a:t>
+            </a:r>
+            <a:r>
+              <a:rPr lang="en-US" altLang="zh-CN" sz="2000" dirty="0">
+                <a:latin typeface="Times New Roman"/>
+                <a:ea typeface="+mn-lt"/>
+                <a:cs typeface="Times New Roman"/>
+              </a:rPr>
+              <a:t>to</a:t>
+            </a:r>
+            <a:r>
+              <a:rPr lang="zh-CN" sz="2000" dirty="0">
+                <a:latin typeface="Times New Roman"/>
+                <a:ea typeface="+mn-lt"/>
+                <a:cs typeface="Times New Roman"/>
+              </a:rPr>
+              <a:t> </a:t>
+            </a:r>
+            <a:r>
+              <a:rPr lang="en-US" altLang="zh-CN" sz="2000" dirty="0">
+                <a:latin typeface="Times New Roman"/>
+                <a:ea typeface="+mn-lt"/>
+                <a:cs typeface="Times New Roman"/>
+              </a:rPr>
+              <a:t>evaluate</a:t>
+            </a:r>
+            <a:r>
+              <a:rPr lang="zh-CN" sz="2000" dirty="0">
+                <a:latin typeface="Times New Roman"/>
+                <a:ea typeface="+mn-lt"/>
+                <a:cs typeface="Times New Roman"/>
+              </a:rPr>
+              <a:t> </a:t>
+            </a:r>
+            <a:r>
+              <a:rPr lang="en-US" altLang="zh-CN" sz="2000" dirty="0">
+                <a:latin typeface="Times New Roman"/>
+                <a:ea typeface="+mn-lt"/>
+                <a:cs typeface="Times New Roman"/>
+              </a:rPr>
+              <a:t>alternative</a:t>
+            </a:r>
+            <a:r>
+              <a:rPr lang="zh-CN" sz="2000">
+                <a:latin typeface="Times New Roman"/>
+                <a:ea typeface="+mn-lt"/>
+                <a:cs typeface="Times New Roman"/>
+              </a:rPr>
+              <a:t> candidate</a:t>
+            </a:r>
+            <a:r>
+              <a:rPr lang="en-US" altLang="zh-CN" sz="2000" dirty="0">
+                <a:latin typeface="Times New Roman"/>
+                <a:ea typeface="+mn-lt"/>
+                <a:cs typeface="Times New Roman"/>
+              </a:rPr>
+              <a:t>-selection</a:t>
+            </a:r>
+            <a:r>
+              <a:rPr lang="zh-CN" sz="2000" dirty="0">
+                <a:latin typeface="Times New Roman"/>
+                <a:ea typeface="+mn-lt"/>
+                <a:cs typeface="Times New Roman"/>
+              </a:rPr>
+              <a:t> </a:t>
+            </a:r>
+            <a:r>
+              <a:rPr lang="en-US" altLang="zh-CN" sz="2000" dirty="0" err="1">
+                <a:latin typeface="Times New Roman"/>
+                <a:ea typeface="+mn-lt"/>
+                <a:cs typeface="Times New Roman"/>
+              </a:rPr>
+              <a:t>strategie</a:t>
+            </a:r>
+            <a:r>
+              <a:rPr lang="zh-CN" sz="2000">
+                <a:latin typeface="Times New Roman"/>
+                <a:ea typeface="+mn-lt"/>
+                <a:cs typeface="Times New Roman"/>
+              </a:rPr>
+              <a:t>s.</a:t>
+            </a:r>
+            <a:endParaRPr lang="zh-CN">
+              <a:latin typeface="Times New Roman"/>
+              <a:cs typeface="Times New Roman"/>
+            </a:endParaRPr>
+          </a:p>
+          <a:p>
+            <a:endParaRPr lang="zh-CN" sz="2000">
               <a:latin typeface="Times New Roman"/>
               <a:ea typeface="等线"/>
               <a:cs typeface="Times New Roman"/>
@@ -8402,15 +9064,7 @@
                 <a:ea typeface="+mn-lt"/>
                 <a:cs typeface="Times New Roman"/>
               </a:rPr>
-              <a:t> (pp. 3670–3680). Association for Computing Machinery. </a:t>
-            </a:r>
-            <a:r>
-              <a:rPr lang="zh-CN" sz="2000" dirty="0">
-                <a:latin typeface="Times New Roman"/>
-                <a:ea typeface="+mn-lt"/>
-                <a:cs typeface="Times New Roman"/>
-              </a:rPr>
-              <a:t>https://doi.org/10.1145/3726302.3730279 </a:t>
+              <a:t> (pp. 3670–3680). Association for Computing Machinery. https://doi.org/10.1145/3726302.3730279 </a:t>
             </a:r>
             <a:endParaRPr lang="zh-CN" altLang="en-US" sz="2000">
               <a:latin typeface="Times New Roman"/>
@@ -8746,4 +9400,299 @@
     </a:ext>
   </a:extLst>
 </a:theme>
+</file>
+
+<file path=ppt/theme/theme2.xml><?xml version="1.0" encoding="utf-8"?>
+<a:theme xmlns:a="http://schemas.openxmlformats.org/drawingml/2006/main" name="Office 主题​​">
+  <a:themeElements>
+    <a:clrScheme name="Office">
+      <a:dk1>
+        <a:sysClr val="windowText" lastClr="000000"/>
+      </a:dk1>
+      <a:lt1>
+        <a:sysClr val="window" lastClr="FFFFFF"/>
+      </a:lt1>
+      <a:dk2>
+        <a:srgbClr val="44546A"/>
+      </a:dk2>
+      <a:lt2>
+        <a:srgbClr val="E7E6E6"/>
+      </a:lt2>
+      <a:accent1>
+        <a:srgbClr val="4472C4"/>
+      </a:accent1>
+      <a:accent2>
+        <a:srgbClr val="ED7D31"/>
+      </a:accent2>
+      <a:accent3>
+        <a:srgbClr val="A5A5A5"/>
+      </a:accent3>
+      <a:accent4>
+        <a:srgbClr val="FFC000"/>
+      </a:accent4>
+      <a:accent5>
+        <a:srgbClr val="5B9BD5"/>
+      </a:accent5>
+      <a:accent6>
+        <a:srgbClr val="70AD47"/>
+      </a:accent6>
+      <a:hlink>
+        <a:srgbClr val="0563C1"/>
+      </a:hlink>
+      <a:folHlink>
+        <a:srgbClr val="954F72"/>
+      </a:folHlink>
+    </a:clrScheme>
+    <a:fontScheme name="Office">
+      <a:majorFont>
+        <a:latin typeface="等线 Light" panose="020F0302020204030204"/>
+        <a:ea typeface=""/>
+        <a:cs typeface=""/>
+        <a:font script="Jpan" typeface="游ゴシック Light"/>
+        <a:font script="Hang" typeface="맑은 고딕"/>
+        <a:font script="Hans" typeface="等线 Light"/>
+        <a:font script="Hant" typeface="新細明體"/>
+        <a:font script="Arab" typeface="Times New Roman"/>
+        <a:font script="Hebr" typeface="Times New Roman"/>
+        <a:font script="Thai" typeface="Angsana New"/>
+        <a:font script="Ethi" typeface="Nyala"/>
+        <a:font script="Beng" typeface="Vrinda"/>
+        <a:font script="Gujr" typeface="Shruti"/>
+        <a:font script="Khmr" typeface="MoolBoran"/>
+        <a:font script="Knda" typeface="Tunga"/>
+        <a:font script="Guru" typeface="Raavi"/>
+        <a:font script="Cans" typeface="Euphemia"/>
+        <a:font script="Cher" typeface="Plantagenet Cherokee"/>
+        <a:font script="Yiii" typeface="Microsoft Yi Baiti"/>
+        <a:font script="Tibt" typeface="Microsoft Himalaya"/>
+        <a:font script="Thaa" typeface="MV Boli"/>
+        <a:font script="Deva" typeface="Mangal"/>
+        <a:font script="Telu" typeface="Gautami"/>
+        <a:font script="Taml" typeface="Latha"/>
+        <a:font script="Syrc" typeface="Estrangelo Edessa"/>
+        <a:font script="Orya" typeface="Kalinga"/>
+        <a:font script="Mlym" typeface="Kartika"/>
+        <a:font script="Laoo" typeface="DokChampa"/>
+        <a:font script="Sinh" typeface="Iskoola Pota"/>
+        <a:font script="Mong" typeface="Mongolian Baiti"/>
+        <a:font script="Viet" typeface="Times New Roman"/>
+        <a:font script="Uigh" typeface="Microsoft Uighur"/>
+        <a:font script="Geor" typeface="Sylfaen"/>
+        <a:font script="Armn" typeface="Arial"/>
+        <a:font script="Bugi" typeface="Leelawadee UI"/>
+        <a:font script="Bopo" typeface="Microsoft JhengHei"/>
+        <a:font script="Java" typeface="Javanese Text"/>
+        <a:font script="Lisu" typeface="Segoe UI"/>
+        <a:font script="Mymr" typeface="Myanmar Text"/>
+        <a:font script="Nkoo" typeface="Ebrima"/>
+        <a:font script="Olck" typeface="Nirmala UI"/>
+        <a:font script="Osma" typeface="Ebrima"/>
+        <a:font script="Phag" typeface="Phagspa"/>
+        <a:font script="Syrn" typeface="Estrangelo Edessa"/>
+        <a:font script="Syrj" typeface="Estrangelo Edessa"/>
+        <a:font script="Syre" typeface="Estrangelo Edessa"/>
+        <a:font script="Sora" typeface="Nirmala UI"/>
+        <a:font script="Tale" typeface="Microsoft Tai Le"/>
+        <a:font script="Talu" typeface="Microsoft New Tai Lue"/>
+        <a:font script="Tfng" typeface="Ebrima"/>
+      </a:majorFont>
+      <a:minorFont>
+        <a:latin typeface="等线" panose="020F0502020204030204"/>
+        <a:ea typeface=""/>
+        <a:cs typeface=""/>
+        <a:font script="Jpan" typeface="游ゴシック"/>
+        <a:font script="Hang" typeface="맑은 고딕"/>
+        <a:font script="Hans" typeface="等线"/>
+        <a:font script="Hant" typeface="新細明體"/>
+        <a:font script="Arab" typeface="Arial"/>
+        <a:font script="Hebr" typeface="Arial"/>
+        <a:font script="Thai" typeface="Cordia New"/>
+        <a:font script="Ethi" typeface="Nyala"/>
+        <a:font script="Beng" typeface="Vrinda"/>
+        <a:font script="Gujr" typeface="Shruti"/>
+        <a:font script="Khmr" typeface="DaunPenh"/>
+        <a:font script="Knda" typeface="Tunga"/>
+        <a:font script="Guru" typeface="Raavi"/>
+        <a:font script="Cans" typeface="Euphemia"/>
+        <a:font script="Cher" typeface="Plantagenet Cherokee"/>
+        <a:font script="Yiii" typeface="Microsoft Yi Baiti"/>
+        <a:font script="Tibt" typeface="Microsoft Himalaya"/>
+        <a:font script="Thaa" typeface="MV Boli"/>
+        <a:font script="Deva" typeface="Mangal"/>
+        <a:font script="Telu" typeface="Gautami"/>
+        <a:font script="Taml" typeface="Latha"/>
+        <a:font script="Syrc" typeface="Estrangelo Edessa"/>
+        <a:font script="Orya" typeface="Kalinga"/>
+        <a:font script="Mlym" typeface="Kartika"/>
+        <a:font script="Laoo" typeface="DokChampa"/>
+        <a:font script="Sinh" typeface="Iskoola Pota"/>
+        <a:font script="Mong" typeface="Mongolian Baiti"/>
+        <a:font script="Viet" typeface="Arial"/>
+        <a:font script="Uigh" typeface="Microsoft Uighur"/>
+        <a:font script="Geor" typeface="Sylfaen"/>
+        <a:font script="Armn" typeface="Arial"/>
+        <a:font script="Bugi" typeface="Leelawadee UI"/>
+        <a:font script="Bopo" typeface="Microsoft JhengHei"/>
+        <a:font script="Java" typeface="Javanese Text"/>
+        <a:font script="Lisu" typeface="Segoe UI"/>
+        <a:font script="Mymr" typeface="Myanmar Text"/>
+        <a:font script="Nkoo" typeface="Ebrima"/>
+        <a:font script="Olck" typeface="Nirmala UI"/>
+        <a:font script="Osma" typeface="Ebrima"/>
+        <a:font script="Phag" typeface="Phagspa"/>
+        <a:font script="Syrn" typeface="Estrangelo Edessa"/>
+        <a:font script="Syrj" typeface="Estrangelo Edessa"/>
+        <a:font script="Syre" typeface="Estrangelo Edessa"/>
+        <a:font script="Sora" typeface="Nirmala UI"/>
+        <a:font script="Tale" typeface="Microsoft Tai Le"/>
+        <a:font script="Talu" typeface="Microsoft New Tai Lue"/>
+        <a:font script="Tfng" typeface="Ebrima"/>
+      </a:minorFont>
+    </a:fontScheme>
+    <a:fmtScheme name="Office">
+      <a:fillStyleLst>
+        <a:solidFill>
+          <a:schemeClr val="phClr"/>
+        </a:solidFill>
+        <a:gradFill rotWithShape="1">
+          <a:gsLst>
+            <a:gs pos="0">
+              <a:schemeClr val="phClr">
+                <a:lumMod val="110000"/>
+                <a:satMod val="105000"/>
+                <a:tint val="67000"/>
+              </a:schemeClr>
+            </a:gs>
+            <a:gs pos="50000">
+              <a:schemeClr val="phClr">
+                <a:lumMod val="105000"/>
+                <a:satMod val="103000"/>
+                <a:tint val="73000"/>
+              </a:schemeClr>
+            </a:gs>
+            <a:gs pos="100000">
+              <a:schemeClr val="phClr">
+                <a:lumMod val="105000"/>
+                <a:satMod val="109000"/>
+                <a:tint val="81000"/>
+              </a:schemeClr>
+            </a:gs>
+          </a:gsLst>
+          <a:lin ang="5400000" scaled="0"/>
+        </a:gradFill>
+        <a:gradFill rotWithShape="1">
+          <a:gsLst>
+            <a:gs pos="0">
+              <a:schemeClr val="phClr">
+                <a:satMod val="103000"/>
+                <a:lumMod val="102000"/>
+                <a:tint val="94000"/>
+              </a:schemeClr>
+            </a:gs>
+            <a:gs pos="50000">
+              <a:schemeClr val="phClr">
+                <a:satMod val="110000"/>
+                <a:lumMod val="100000"/>
+                <a:shade val="100000"/>
+              </a:schemeClr>
+            </a:gs>
+            <a:gs pos="100000">
+              <a:schemeClr val="phClr">
+                <a:lumMod val="99000"/>
+                <a:satMod val="120000"/>
+                <a:shade val="78000"/>
+              </a:schemeClr>
+            </a:gs>
+          </a:gsLst>
+          <a:lin ang="5400000" scaled="0"/>
+        </a:gradFill>
+      </a:fillStyleLst>
+      <a:lnStyleLst>
+        <a:ln w="6350" cap="flat" cmpd="sng" algn="ctr">
+          <a:solidFill>
+            <a:schemeClr val="phClr"/>
+          </a:solidFill>
+          <a:prstDash val="solid"/>
+          <a:miter lim="800000"/>
+        </a:ln>
+        <a:ln w="12700" cap="flat" cmpd="sng" algn="ctr">
+          <a:solidFill>
+            <a:schemeClr val="phClr"/>
+          </a:solidFill>
+          <a:prstDash val="solid"/>
+          <a:miter lim="800000"/>
+        </a:ln>
+        <a:ln w="19050" cap="flat" cmpd="sng" algn="ctr">
+          <a:solidFill>
+            <a:schemeClr val="phClr"/>
+          </a:solidFill>
+          <a:prstDash val="solid"/>
+          <a:miter lim="800000"/>
+        </a:ln>
+      </a:lnStyleLst>
+      <a:effectStyleLst>
+        <a:effectStyle>
+          <a:effectLst/>
+        </a:effectStyle>
+        <a:effectStyle>
+          <a:effectLst/>
+        </a:effectStyle>
+        <a:effectStyle>
+          <a:effectLst>
+            <a:outerShdw blurRad="57150" dist="19050" dir="5400000" algn="ctr" rotWithShape="0">
+              <a:srgbClr val="000000">
+                <a:alpha val="63000"/>
+              </a:srgbClr>
+            </a:outerShdw>
+          </a:effectLst>
+        </a:effectStyle>
+      </a:effectStyleLst>
+      <a:bgFillStyleLst>
+        <a:solidFill>
+          <a:schemeClr val="phClr"/>
+        </a:solidFill>
+        <a:solidFill>
+          <a:schemeClr val="phClr">
+            <a:tint val="95000"/>
+            <a:satMod val="170000"/>
+          </a:schemeClr>
+        </a:solidFill>
+        <a:gradFill rotWithShape="1">
+          <a:gsLst>
+            <a:gs pos="0">
+              <a:schemeClr val="phClr">
+                <a:tint val="93000"/>
+                <a:satMod val="150000"/>
+                <a:shade val="98000"/>
+                <a:lumMod val="102000"/>
+              </a:schemeClr>
+            </a:gs>
+            <a:gs pos="50000">
+              <a:schemeClr val="phClr">
+                <a:tint val="98000"/>
+                <a:satMod val="130000"/>
+                <a:shade val="90000"/>
+                <a:lumMod val="103000"/>
+              </a:schemeClr>
+            </a:gs>
+            <a:gs pos="100000">
+              <a:schemeClr val="phClr">
+                <a:shade val="63000"/>
+                <a:satMod val="120000"/>
+              </a:schemeClr>
+            </a:gs>
+          </a:gsLst>
+          <a:lin ang="5400000" scaled="0"/>
+        </a:gradFill>
+      </a:bgFillStyleLst>
+    </a:fmtScheme>
+  </a:themeElements>
+  <a:objectDefaults/>
+  <a:extraClrSchemeLst/>
+  <a:extLst>
+    <a:ext uri="{05A4C25C-085E-4340-85A3-A5531E510DB2}">
+      <thm15:themeFamily xmlns:thm15="http://schemas.microsoft.com/office/thememl/2012/main" name="Office Theme" id="{62F939B6-93AF-4DB8-9C6B-D6C7DFDC589F}" vid="{4A3C46E8-61CC-4603-A589-7422A47A8E4A}"/>
+    </a:ext>
+  </a:extLst>
+</a:theme>
 </file>